--- a/submission/FasalProof_Pitch_Deck.pptx
+++ b/submission/FasalProof_Pitch_Deck.pptx
@@ -12,9 +12,10 @@
     <p:sldId id="260" r:id="rId6"/>
     <p:sldId id="261" r:id="rId7"/>
     <p:sldId id="262" r:id="rId8"/>
+    <p:sldId id="263" r:id="rId9"/>
   </p:sldIdLst>
   <p:notesMasterIdLst>
-    <p:notesMasterId r:id="rId9"/>
+    <p:notesMasterId r:id="rId10"/>
   </p:notesMasterIdLst>
   <p:sldSz cx="9144000" cy="5143500"/>
   <p:notesSz cx="5143500" cy="9144000"/>
@@ -113,35 +114,36 @@
   <p:extLst>
     <p:ext uri="{521415D9-36F7-43E2-AB2F-B90AF26B5E84}">
       <p14:sectionLst xmlns:p14="http://schemas.microsoft.com/office/powerpoint/2010/main">
-        <p14:section name="Open" id="{bfb68a4b-dca5-a3dd-1bcb-7c25b0a9320d}">
+        <p14:section name="Open" id="{50cbe143-0db9-9063-ada0-2fa22f8665ae}">
           <p14:sldIdLst>
             <p14:sldId id="256"/>
           </p14:sldIdLst>
         </p14:section>
-        <p14:section name="Problem" id="{f1c02239-e1d0-eafc-23c8-61f356db0c5e}">
+        <p14:section name="Problem" id="{e155b201-48e2-f05f-b94f-8dc74974dbc8}">
           <p14:sldIdLst>
             <p14:sldId id="257"/>
           </p14:sldIdLst>
         </p14:section>
-        <p14:section name="Solution" id="{46b27bee-bfa8-76cb-4f5a-f9914847c499}">
+        <p14:section name="Solution" id="{832ab9a1-619d-2513-b871-a1b3db25a519}">
           <p14:sldIdLst>
             <p14:sldId id="258"/>
           </p14:sldIdLst>
         </p14:section>
-        <p14:section name="Tech" id="{b2f79ee9-0dcd-2a32-7cbe-07562c642e31}">
+        <p14:section name="Tech" id="{7099c1a4-5ca9-d179-ddca-07bf2e0c3a28}">
           <p14:sldIdLst>
             <p14:sldId id="259"/>
             <p14:sldId id="260"/>
-          </p14:sldIdLst>
-        </p14:section>
-        <p14:section name="Trust" id="{e9d7638d-5d2e-d4c4-7e36-3567cda61708}">
-          <p14:sldIdLst>
             <p14:sldId id="261"/>
           </p14:sldIdLst>
         </p14:section>
-        <p14:section name="Close" id="{2c817e53-3376-5596-b047-43ec7daf854d}">
+        <p14:section name="Trust" id="{d3a815bd-0ca8-dab2-baf3-b78094f5ae16}">
           <p14:sldIdLst>
             <p14:sldId id="262"/>
+          </p14:sldIdLst>
+        </p14:section>
+        <p14:section name="Close" id="{20476355-e7c6-9a4e-edd1-9fc40d5dbecc}">
+          <p14:sldIdLst>
+            <p14:sldId id="263"/>
           </p14:sldIdLst>
         </p14:section>
       </p14:sectionLst>
@@ -988,7 +990,7 @@
           <a:p>
             <a:r>
               <a:rPr lang="en-US" dirty="0"/>
-              <a:t>Say the limits before a judge does. Spot checks on arbitrary no-event dates showed 14 to 19 percent apparent loss, which is why losses below about 25 percent are not treated as damage. The validation script and table template are in the repository.</a:t>
+              <a:t>Do not disparage dashboards: they answer a different question. Ours is event-conditioned and plot-level, and the output is something a farmer can submit: a signed report, the right claim route and deadline, and a letter in their language.</a:t>
             </a:r>
             <a:endParaRPr lang="en-US" dirty="0"/>
           </a:p>
@@ -1076,7 +1078,7 @@
           <a:p>
             <a:r>
               <a:rPr lang="en-US" dirty="0"/>
-              <a:t>Close with the one-line summary and invite them to open the site. Mention the roadmap in one breath. Be ready for: accuracy, cloud cover in monsoon, why free data, and what the tool cannot do.</a:t>
+              <a:t>Say the limits before a judge does. Real spot checks on three arbitrary dates reported 19.3, 14.1 and 13.7 percent apparent loss with intervals spanning zero, so losses below about 25 percent are not read as damage. That is n equals 3: a warning, not a false-positive rate. Quote the case-study controls from EVIDENCE.md as well. The validation script and table template are in the repository.</a:t>
             </a:r>
             <a:endParaRPr lang="en-US" dirty="0"/>
           </a:p>
@@ -1100,6 +1102,94 @@
             <a:fld id="{F7021451-1387-4CA6-816F-3879F97B5CBC}" type="slidenum">
               <a:rPr lang="en-US"/>
               <a:t>7</a:t>
+            </a:fld>
+            <a:endParaRPr lang="en-US"/>
+          </a:p>
+        </p:txBody>
+      </p:sp>
+    </p:spTree>
+    <p:extLst>
+      <p:ext uri="{BB962C8B-B14F-4D97-AF65-F5344CB8AC3E}">
+        <p14:creationId xmlns:p14="http://schemas.microsoft.com/office/powerpoint/2010/main" val="1024086991"/>
+      </p:ext>
+    </p:extLst>
+  </p:cSld>
+  <p:clrMapOvr>
+    <a:masterClrMapping/>
+  </p:clrMapOvr>
+</p:notes>
+</file>
+
+<file path=ppt/notesSlides/notesSlide8.xml><?xml version="1.0" encoding="utf-8"?>
+<p:notes xmlns:a="http://schemas.openxmlformats.org/drawingml/2006/main" xmlns:r="http://schemas.openxmlformats.org/officeDocument/2006/relationships" xmlns:p="http://schemas.openxmlformats.org/presentationml/2006/main">
+  <p:cSld>
+    <p:spTree>
+      <p:nvGrpSpPr>
+        <p:cNvPr id="1" name=""/>
+        <p:cNvGrpSpPr/>
+        <p:nvPr/>
+      </p:nvGrpSpPr>
+      <p:grpSpPr>
+        <a:xfrm>
+          <a:off x="0" y="0"/>
+          <a:ext cx="0" cy="0"/>
+          <a:chOff x="0" y="0"/>
+          <a:chExt cx="0" cy="0"/>
+        </a:xfrm>
+      </p:grpSpPr>
+      <p:sp>
+        <p:nvSpPr>
+          <p:cNvPr id="2" name="Slide Image Placeholder 1"/>
+          <p:cNvSpPr>
+            <a:spLocks noGrp="1" noRot="1" noChangeAspect="1"/>
+          </p:cNvSpPr>
+          <p:nvPr>
+            <p:ph type="sldImg"/>
+          </p:nvPr>
+        </p:nvSpPr>
+        <p:spPr/>
+      </p:sp>
+      <p:sp>
+        <p:nvSpPr>
+          <p:cNvPr id="3" name="Notes Placeholder 2"/>
+          <p:cNvSpPr>
+            <a:spLocks noGrp="1"/>
+          </p:cNvSpPr>
+          <p:nvPr>
+            <p:ph type="body" idx="1"/>
+          </p:nvPr>
+        </p:nvSpPr>
+        <p:spPr/>
+        <p:txBody>
+          <a:bodyPr/>
+          <a:lstStyle/>
+          <a:p>
+            <a:r>
+              <a:rPr lang="en-US" dirty="0"/>
+              <a:t>Close with the one-line summary and invite them to open the site. Mention the roadmap in one breath. Be ready for: accuracy, cloud cover in monsoon, why free data, and what the tool cannot do.</a:t>
+            </a:r>
+            <a:endParaRPr lang="en-US" dirty="0"/>
+          </a:p>
+        </p:txBody>
+      </p:sp>
+      <p:sp>
+        <p:nvSpPr>
+          <p:cNvPr id="4" name="Slide Number Placeholder 3"/>
+          <p:cNvSpPr>
+            <a:spLocks noGrp="1"/>
+          </p:cNvSpPr>
+          <p:nvPr>
+            <p:ph type="sldNum" sz="quarter" idx="10"/>
+          </p:nvPr>
+        </p:nvSpPr>
+        <p:spPr/>
+        <p:txBody>
+          <a:bodyPr/>
+          <a:lstStyle/>
+          <a:p>
+            <a:fld id="{F7021451-1387-4CA6-816F-3879F97B5CBC}" type="slidenum">
+              <a:rPr lang="en-US"/>
+              <a:t>8</a:t>
             </a:fld>
             <a:endParaRPr lang="en-US"/>
           </a:p>
@@ -5072,7 +5162,7 @@
                   <a:schemeClr val="tx1"/>
                 </a:solidFill>
               </a:rPr>
-              <a:t>Honest by design</a:t>
+              <a:t>More than a dashboard</a:t>
             </a:r>
             <a:endParaRPr lang="en-US" sz="3600" dirty="0"/>
           </a:p>
@@ -5080,7 +5170,7 @@
       </p:sp>
       <p:sp>
         <p:nvSpPr>
-          <p:cNvPr id="3" name="Limits card"/>
+          <p:cNvPr id="3" name="Dashboard card"/>
           <p:cNvSpPr/>
           <p:nvPr/>
         </p:nvSpPr>
@@ -5107,7 +5197,7 @@
       </p:sp>
       <p:sp>
         <p:nvSpPr>
-          <p:cNvPr id="4" name="Validation card"/>
+          <p:cNvPr id="4" name="FasalProof card"/>
           <p:cNvSpPr/>
           <p:nvPr/>
         </p:nvSpPr>
@@ -5122,11 +5212,11 @@
             </a:avLst>
           </a:prstGeom>
           <a:solidFill>
-            <a:schemeClr val="bg2"/>
+            <a:schemeClr val="tx1"/>
           </a:solidFill>
           <a:ln w="12700">
             <a:solidFill>
-              <a:schemeClr val="bg2"/>
+              <a:schemeClr val="tx1"/>
             </a:solidFill>
             <a:prstDash val="solid"/>
           </a:ln>
@@ -5162,7 +5252,7 @@
                   <a:schemeClr val="tx1"/>
                 </a:solidFill>
               </a:rPr>
-              <a:t>Limits we show on screen</a:t>
+              <a:t>A conventional dashboard</a:t>
             </a:r>
             <a:endParaRPr lang="en-US" sz="2000" dirty="0"/>
           </a:p>
@@ -5176,7 +5266,7 @@
         </p:nvSpPr>
         <p:spPr>
           <a:xfrm>
-            <a:off x="777240" y="2011680"/>
+            <a:off x="777240" y="2057400"/>
             <a:ext cx="3474720" cy="2286000"/>
           </a:xfrm>
           <a:prstGeom prst="rect">
@@ -5202,7 +5292,7 @@
                   <a:schemeClr val="tx2"/>
                 </a:solidFill>
               </a:rPr>
-              <a:t>Supporting evidence, not an official assessment</a:t>
+              <a:t>Aggregates by district or region</a:t>
             </a:r>
             <a:endParaRPr lang="en-US" sz="1400" dirty="0"/>
           </a:p>
@@ -5220,7 +5310,7 @@
                   <a:schemeClr val="tx2"/>
                 </a:solidFill>
               </a:rPr>
-              <a:t>No accuracy figure claimed yet</a:t>
+              <a:t>Asks: how is the season going?</a:t>
             </a:r>
             <a:endParaRPr lang="en-US" sz="1400" dirty="0"/>
           </a:p>
@@ -5238,7 +5328,7 @@
                   <a:schemeClr val="tx2"/>
                 </a:solidFill>
               </a:rPr>
-              <a:t>Stage data are regional averages</a:t>
+              <a:t>Leaves the charts to the viewer</a:t>
             </a:r>
             <a:endParaRPr lang="en-US" sz="1400" dirty="0"/>
           </a:p>
@@ -5256,7 +5346,7 @@
                   <a:schemeClr val="tx2"/>
                 </a:solidFill>
               </a:rPr>
-              <a:t>Rules and sum insured come from the policy</a:t>
+              <a:t>Output is a view</a:t>
             </a:r>
             <a:endParaRPr lang="en-US" sz="1400" dirty="0"/>
           </a:p>
@@ -5289,10 +5379,10 @@
             <a:r>
               <a:rPr lang="en-US" sz="2000" b="1" dirty="0">
                 <a:solidFill>
-                  <a:schemeClr val="tx1"/>
-                </a:solidFill>
-              </a:rPr>
-              <a:t>How we will validate</a:t>
+                  <a:schemeClr val="accent1"/>
+                </a:solidFill>
+              </a:rPr>
+              <a:t>FasalProof</a:t>
             </a:r>
             <a:endParaRPr lang="en-US" sz="2000" dirty="0"/>
           </a:p>
@@ -5306,7 +5396,7 @@
         </p:nvSpPr>
         <p:spPr>
           <a:xfrm>
-            <a:off x="4892040" y="2011680"/>
+            <a:off x="4892040" y="2057400"/>
             <a:ext cx="3474720" cy="2286000"/>
           </a:xfrm>
           <a:prstGeom prst="rect">
@@ -5329,10 +5419,10 @@
             <a:r>
               <a:rPr lang="en-US" sz="1400" dirty="0">
                 <a:solidFill>
-                  <a:schemeClr val="tx2"/>
-                </a:solidFill>
-              </a:rPr>
-              <a:t>Documented damaged fields plus no-event fields</a:t>
+                  <a:schemeClr val="bg1"/>
+                </a:solidFill>
+              </a:rPr>
+              <a:t>Starts from one plot and one loss date</a:t>
             </a:r>
             <a:endParaRPr lang="en-US" sz="1400" dirty="0"/>
           </a:p>
@@ -5347,10 +5437,10 @@
             <a:r>
               <a:rPr lang="en-US" sz="1400" dirty="0">
                 <a:solidFill>
-                  <a:schemeClr val="tx2"/>
-                </a:solidFill>
-              </a:rPr>
-              <a:t>Precision, recall and specificity</a:t>
+                  <a:schemeClr val="bg1"/>
+                </a:solidFill>
+              </a:rPr>
+              <a:t>Asks: was this field damaged, by how much, how sure are we?</a:t>
             </a:r>
             <a:endParaRPr lang="en-US" sz="1400" dirty="0"/>
           </a:p>
@@ -5365,10 +5455,10 @@
             <a:r>
               <a:rPr lang="en-US" sz="1400" dirty="0">
                 <a:solidFill>
-                  <a:schemeClr val="tx2"/>
-                </a:solidFill>
-              </a:rPr>
-              <a:t>Error against officially reported loss</a:t>
+                  <a:schemeClr val="bg1"/>
+                </a:solidFill>
+              </a:rPr>
+              <a:t>Adds local rain history, crop stage, claim route and deadline</a:t>
             </a:r>
             <a:endParaRPr lang="en-US" sz="1400" dirty="0"/>
           </a:p>
@@ -5383,10 +5473,10 @@
             <a:r>
               <a:rPr lang="en-US" sz="1400" dirty="0">
                 <a:solidFill>
-                  <a:schemeClr val="tx2"/>
-                </a:solidFill>
-              </a:rPr>
-              <a:t>Results published in the README</a:t>
+                  <a:schemeClr val="bg1"/>
+                </a:solidFill>
+              </a:rPr>
+              <a:t>Output is a signed evidence pack and a claim letter</a:t>
             </a:r>
             <a:endParaRPr lang="en-US" sz="1400" dirty="0"/>
           </a:p>
@@ -5448,6 +5538,428 @@
 <file path=ppt/slides/slide7.xml><?xml version="1.0" encoding="utf-8"?>
 <p:sld xmlns:a="http://schemas.openxmlformats.org/drawingml/2006/main" xmlns:r="http://schemas.openxmlformats.org/officeDocument/2006/relationships" xmlns:p="http://schemas.openxmlformats.org/presentationml/2006/main">
   <p:cSld name="Slide 7">
+    <p:spTree>
+      <p:nvGrpSpPr>
+        <p:cNvPr id="1" name=""/>
+        <p:cNvGrpSpPr/>
+        <p:nvPr/>
+      </p:nvGrpSpPr>
+      <p:grpSpPr>
+        <a:xfrm>
+          <a:off x="0" y="0"/>
+          <a:ext cx="0" cy="0"/>
+          <a:chOff x="0" y="0"/>
+          <a:chExt cx="0" cy="0"/>
+        </a:xfrm>
+      </p:grpSpPr>
+      <p:sp>
+        <p:nvSpPr>
+          <p:cNvPr id="2" name="Text 1"/>
+          <p:cNvSpPr/>
+          <p:nvPr>
+            <p:ph idx="101" type="title" hasCustomPrompt="1"/>
+          </p:nvPr>
+        </p:nvSpPr>
+        <p:spPr>
+          <a:xfrm>
+            <a:off x="548640" y="411480"/>
+            <a:ext cx="8046720" cy="731520"/>
+          </a:xfrm>
+          <a:prstGeom prst="rect">
+            <a:avLst/>
+          </a:prstGeom>
+          <a:noFill/>
+          <a:ln/>
+        </p:spPr>
+        <p:txBody>
+          <a:bodyPr wrap="square" lIns="0" tIns="0" rIns="0" bIns="0" rtlCol="0" anchor="t"/>
+          <a:lstStyle/>
+          <a:p>
+            <a:pPr algn="l" indent="0" marL="0">
+              <a:buNone/>
+            </a:pPr>
+            <a:r>
+              <a:rPr lang="en-US" sz="3600" b="1" dirty="0">
+                <a:solidFill>
+                  <a:schemeClr val="tx1"/>
+                </a:solidFill>
+              </a:rPr>
+              <a:t>Honest by design</a:t>
+            </a:r>
+            <a:endParaRPr lang="en-US" sz="3600" dirty="0"/>
+          </a:p>
+        </p:txBody>
+      </p:sp>
+      <p:sp>
+        <p:nvSpPr>
+          <p:cNvPr id="3" name="Limits card"/>
+          <p:cNvSpPr/>
+          <p:nvPr/>
+        </p:nvSpPr>
+        <p:spPr>
+          <a:xfrm>
+            <a:off x="548640" y="1371600"/>
+            <a:ext cx="3931920" cy="3108960"/>
+          </a:xfrm>
+          <a:prstGeom prst="roundRect">
+            <a:avLst>
+              <a:gd name="adj" fmla="val 3529"/>
+            </a:avLst>
+          </a:prstGeom>
+          <a:solidFill>
+            <a:schemeClr val="bg2"/>
+          </a:solidFill>
+          <a:ln w="12700">
+            <a:solidFill>
+              <a:schemeClr val="bg2"/>
+            </a:solidFill>
+            <a:prstDash val="solid"/>
+          </a:ln>
+        </p:spPr>
+      </p:sp>
+      <p:sp>
+        <p:nvSpPr>
+          <p:cNvPr id="4" name="Validation card"/>
+          <p:cNvSpPr/>
+          <p:nvPr/>
+        </p:nvSpPr>
+        <p:spPr>
+          <a:xfrm>
+            <a:off x="4663440" y="1371600"/>
+            <a:ext cx="3931920" cy="3108960"/>
+          </a:xfrm>
+          <a:prstGeom prst="roundRect">
+            <a:avLst>
+              <a:gd name="adj" fmla="val 3529"/>
+            </a:avLst>
+          </a:prstGeom>
+          <a:solidFill>
+            <a:schemeClr val="bg2"/>
+          </a:solidFill>
+          <a:ln w="12700">
+            <a:solidFill>
+              <a:schemeClr val="bg2"/>
+            </a:solidFill>
+            <a:prstDash val="solid"/>
+          </a:ln>
+        </p:spPr>
+      </p:sp>
+      <p:sp>
+        <p:nvSpPr>
+          <p:cNvPr id="5" name="Text 3"/>
+          <p:cNvSpPr txBox="1"/>
+          <p:nvPr/>
+        </p:nvSpPr>
+        <p:spPr>
+          <a:xfrm>
+            <a:off x="777240" y="1554480"/>
+            <a:ext cx="3474720" cy="365760"/>
+          </a:xfrm>
+          <a:prstGeom prst="rect">
+            <a:avLst/>
+          </a:prstGeom>
+          <a:noFill/>
+          <a:ln/>
+        </p:spPr>
+        <p:txBody>
+          <a:bodyPr wrap="square" lIns="0" tIns="0" rIns="0" bIns="0" rtlCol="0" anchor="ctr"/>
+          <a:lstStyle/>
+          <a:p>
+            <a:pPr indent="0" marL="0">
+              <a:buNone/>
+            </a:pPr>
+            <a:r>
+              <a:rPr lang="en-US" sz="2000" b="1" dirty="0">
+                <a:solidFill>
+                  <a:schemeClr val="tx1"/>
+                </a:solidFill>
+              </a:rPr>
+              <a:t>Limits we show on screen</a:t>
+            </a:r>
+            <a:endParaRPr lang="en-US" sz="2000" dirty="0"/>
+          </a:p>
+        </p:txBody>
+      </p:sp>
+      <p:sp>
+        <p:nvSpPr>
+          <p:cNvPr id="6" name="Text 4"/>
+          <p:cNvSpPr txBox="1"/>
+          <p:nvPr/>
+        </p:nvSpPr>
+        <p:spPr>
+          <a:xfrm>
+            <a:off x="777240" y="2011680"/>
+            <a:ext cx="3474720" cy="2286000"/>
+          </a:xfrm>
+          <a:prstGeom prst="rect">
+            <a:avLst/>
+          </a:prstGeom>
+          <a:noFill/>
+          <a:ln/>
+        </p:spPr>
+        <p:txBody>
+          <a:bodyPr wrap="square" lIns="0" tIns="0" rIns="0" bIns="0" rtlCol="0" anchor="t"/>
+          <a:lstStyle/>
+          <a:p>
+            <a:pPr marL="342900" indent="-342900">
+              <a:spcAft>
+                <a:spcPts val="800"/>
+              </a:spcAft>
+              <a:buSzPct val="100000"/>
+              <a:buChar char="•"/>
+            </a:pPr>
+            <a:r>
+              <a:rPr lang="en-US" sz="1400" dirty="0">
+                <a:solidFill>
+                  <a:schemeClr val="tx2"/>
+                </a:solidFill>
+              </a:rPr>
+              <a:t>Supporting evidence, not an official assessment</a:t>
+            </a:r>
+            <a:endParaRPr lang="en-US" sz="1400" dirty="0"/>
+          </a:p>
+          <a:p>
+            <a:pPr marL="342900" indent="-342900">
+              <a:spcAft>
+                <a:spcPts val="800"/>
+              </a:spcAft>
+              <a:buSzPct val="100000"/>
+              <a:buChar char="•"/>
+            </a:pPr>
+            <a:r>
+              <a:rPr lang="en-US" sz="1400" dirty="0">
+                <a:solidFill>
+                  <a:schemeClr val="tx2"/>
+                </a:solidFill>
+              </a:rPr>
+              <a:t>No accuracy figure claimed yet</a:t>
+            </a:r>
+            <a:endParaRPr lang="en-US" sz="1400" dirty="0"/>
+          </a:p>
+          <a:p>
+            <a:pPr marL="342900" indent="-342900">
+              <a:spcAft>
+                <a:spcPts val="800"/>
+              </a:spcAft>
+              <a:buSzPct val="100000"/>
+              <a:buChar char="•"/>
+            </a:pPr>
+            <a:r>
+              <a:rPr lang="en-US" sz="1400" dirty="0">
+                <a:solidFill>
+                  <a:schemeClr val="tx2"/>
+                </a:solidFill>
+              </a:rPr>
+              <a:t>Stage data are regional averages</a:t>
+            </a:r>
+            <a:endParaRPr lang="en-US" sz="1400" dirty="0"/>
+          </a:p>
+          <a:p>
+            <a:pPr marL="342900" indent="-342900">
+              <a:spcAft>
+                <a:spcPts val="800"/>
+              </a:spcAft>
+              <a:buSzPct val="100000"/>
+              <a:buChar char="•"/>
+            </a:pPr>
+            <a:r>
+              <a:rPr lang="en-US" sz="1400" dirty="0">
+                <a:solidFill>
+                  <a:schemeClr val="tx2"/>
+                </a:solidFill>
+              </a:rPr>
+              <a:t>Rules and sum insured come from the policy</a:t>
+            </a:r>
+            <a:endParaRPr lang="en-US" sz="1400" dirty="0"/>
+          </a:p>
+        </p:txBody>
+      </p:sp>
+      <p:sp>
+        <p:nvSpPr>
+          <p:cNvPr id="7" name="Text 5"/>
+          <p:cNvSpPr txBox="1"/>
+          <p:nvPr/>
+        </p:nvSpPr>
+        <p:spPr>
+          <a:xfrm>
+            <a:off x="4892040" y="1554480"/>
+            <a:ext cx="3474720" cy="365760"/>
+          </a:xfrm>
+          <a:prstGeom prst="rect">
+            <a:avLst/>
+          </a:prstGeom>
+          <a:noFill/>
+          <a:ln/>
+        </p:spPr>
+        <p:txBody>
+          <a:bodyPr wrap="square" lIns="0" tIns="0" rIns="0" bIns="0" rtlCol="0" anchor="ctr"/>
+          <a:lstStyle/>
+          <a:p>
+            <a:pPr indent="0" marL="0">
+              <a:buNone/>
+            </a:pPr>
+            <a:r>
+              <a:rPr lang="en-US" sz="2000" b="1" dirty="0">
+                <a:solidFill>
+                  <a:schemeClr val="tx1"/>
+                </a:solidFill>
+              </a:rPr>
+              <a:t>How we will validate</a:t>
+            </a:r>
+            <a:endParaRPr lang="en-US" sz="2000" dirty="0"/>
+          </a:p>
+        </p:txBody>
+      </p:sp>
+      <p:sp>
+        <p:nvSpPr>
+          <p:cNvPr id="8" name="Text 6"/>
+          <p:cNvSpPr txBox="1"/>
+          <p:nvPr/>
+        </p:nvSpPr>
+        <p:spPr>
+          <a:xfrm>
+            <a:off x="4892040" y="2011680"/>
+            <a:ext cx="3474720" cy="2286000"/>
+          </a:xfrm>
+          <a:prstGeom prst="rect">
+            <a:avLst/>
+          </a:prstGeom>
+          <a:noFill/>
+          <a:ln/>
+        </p:spPr>
+        <p:txBody>
+          <a:bodyPr wrap="square" lIns="0" tIns="0" rIns="0" bIns="0" rtlCol="0" anchor="t"/>
+          <a:lstStyle/>
+          <a:p>
+            <a:pPr marL="342900" indent="-342900">
+              <a:spcAft>
+                <a:spcPts val="800"/>
+              </a:spcAft>
+              <a:buSzPct val="100000"/>
+              <a:buChar char="•"/>
+            </a:pPr>
+            <a:r>
+              <a:rPr lang="en-US" sz="1400" dirty="0">
+                <a:solidFill>
+                  <a:schemeClr val="tx2"/>
+                </a:solidFill>
+              </a:rPr>
+              <a:t>Documented damaged fields plus no-event fields</a:t>
+            </a:r>
+            <a:endParaRPr lang="en-US" sz="1400" dirty="0"/>
+          </a:p>
+          <a:p>
+            <a:pPr marL="342900" indent="-342900">
+              <a:spcAft>
+                <a:spcPts val="800"/>
+              </a:spcAft>
+              <a:buSzPct val="100000"/>
+              <a:buChar char="•"/>
+            </a:pPr>
+            <a:r>
+              <a:rPr lang="en-US" sz="1400" dirty="0">
+                <a:solidFill>
+                  <a:schemeClr val="tx2"/>
+                </a:solidFill>
+              </a:rPr>
+              <a:t>Precision, recall and specificity</a:t>
+            </a:r>
+            <a:endParaRPr lang="en-US" sz="1400" dirty="0"/>
+          </a:p>
+          <a:p>
+            <a:pPr marL="342900" indent="-342900">
+              <a:spcAft>
+                <a:spcPts val="800"/>
+              </a:spcAft>
+              <a:buSzPct val="100000"/>
+              <a:buChar char="•"/>
+            </a:pPr>
+            <a:r>
+              <a:rPr lang="en-US" sz="1400" dirty="0">
+                <a:solidFill>
+                  <a:schemeClr val="tx2"/>
+                </a:solidFill>
+              </a:rPr>
+              <a:t>Error against officially reported loss</a:t>
+            </a:r>
+            <a:endParaRPr lang="en-US" sz="1400" dirty="0"/>
+          </a:p>
+          <a:p>
+            <a:pPr marL="342900" indent="-342900">
+              <a:spcAft>
+                <a:spcPts val="800"/>
+              </a:spcAft>
+              <a:buSzPct val="100000"/>
+              <a:buChar char="•"/>
+            </a:pPr>
+            <a:r>
+              <a:rPr lang="en-US" sz="1400" dirty="0">
+                <a:solidFill>
+                  <a:schemeClr val="tx2"/>
+                </a:solidFill>
+              </a:rPr>
+              <a:t>Results published in the README</a:t>
+            </a:r>
+            <a:endParaRPr lang="en-US" sz="1400" dirty="0"/>
+          </a:p>
+        </p:txBody>
+      </p:sp>
+      <p:sp>
+        <p:nvSpPr>
+          <p:cNvPr id="25" name="Slide Number Placeholder 0"/>
+          <p:cNvSpPr>
+            <a:spLocks noGrp="1"/>
+          </p:cNvSpPr>
+          <p:nvPr>
+            <p:ph type="sldNum" sz="quarter" idx="4294967295"/>
+          </p:nvPr>
+        </p:nvSpPr>
+        <p:spPr>
+          <a:xfrm>
+            <a:off x="8412480" y="4800600"/>
+            <a:ext cx="457200" cy="228600"/>
+          </a:xfrm>
+          <a:prstGeom prst="rect">
+            <a:avLst/>
+          </a:prstGeom>
+          <a:extLst>
+            <a:ext uri="{C572A759-6A51-4108-AA02-DFA0A04FC94B}">
+              <ma14:wrappingTextBoxFlag xmlns:ma14="http://schemas.microsoft.com/office/mac/drawingml/2011/main" val="0"/>
+            </a:ext>
+          </a:extLst>
+        </p:spPr>
+        <p:txBody>
+          <a:bodyPr/>
+          <a:lstStyle>
+            <a:lvl1pPr>
+              <a:defRPr sz="1000">
+                <a:solidFill>
+                  <a:schemeClr val="tx2"/>
+                </a:solidFill>
+              </a:defRPr>
+            </a:lvl1pPr>
+          </a:lstStyle>
+          <a:p>
+            <a:pPr algn="l"/>
+            <a:fld id="{F7021451-1387-4CA6-816F-3879F97B5CBC}" type="slidenum">
+              <a:rPr b="0" lang="en-US"/>
+              <a:t>7</a:t>
+            </a:fld>
+            <a:endParaRPr lang="en-US"/>
+          </a:p>
+        </p:txBody>
+      </p:sp>
+    </p:spTree>
+  </p:cSld>
+  <p:clrMapOvr>
+    <a:masterClrMapping/>
+  </p:clrMapOvr>
+</p:sld>
+</file>
+
+<file path=ppt/slides/slide8.xml><?xml version="1.0" encoding="utf-8"?>
+<p:sld xmlns:a="http://schemas.openxmlformats.org/drawingml/2006/main" xmlns:r="http://schemas.openxmlformats.org/officeDocument/2006/relationships" xmlns:p="http://schemas.openxmlformats.org/presentationml/2006/main">
+  <p:cSld name="Slide 8">
     <p:spTree>
       <p:nvGrpSpPr>
         <p:cNvPr id="1" name=""/>

--- a/submission/FasalProof_Pitch_Deck.pptx
+++ b/submission/FasalProof_Pitch_Deck.pptx
@@ -13,9 +13,10 @@
     <p:sldId id="261" r:id="rId7"/>
     <p:sldId id="262" r:id="rId8"/>
     <p:sldId id="263" r:id="rId9"/>
+    <p:sldId id="264" r:id="rId10"/>
   </p:sldIdLst>
   <p:notesMasterIdLst>
-    <p:notesMasterId r:id="rId10"/>
+    <p:notesMasterId r:id="rId11"/>
   </p:notesMasterIdLst>
   <p:sldSz cx="9144000" cy="5143500"/>
   <p:notesSz cx="5143500" cy="9144000"/>
@@ -114,36 +115,37 @@
   <p:extLst>
     <p:ext uri="{521415D9-36F7-43E2-AB2F-B90AF26B5E84}">
       <p14:sectionLst xmlns:p14="http://schemas.microsoft.com/office/powerpoint/2010/main">
-        <p14:section name="Open" id="{50cbe143-0db9-9063-ada0-2fa22f8665ae}">
+        <p14:section name="Open" id="{84dc2729-710a-8856-15e3-85852df9485c}">
           <p14:sldIdLst>
             <p14:sldId id="256"/>
           </p14:sldIdLst>
         </p14:section>
-        <p14:section name="Problem" id="{e155b201-48e2-f05f-b94f-8dc74974dbc8}">
+        <p14:section name="Problem" id="{5bbb7e60-16da-2557-6293-971bb2e64968}">
           <p14:sldIdLst>
             <p14:sldId id="257"/>
           </p14:sldIdLst>
         </p14:section>
-        <p14:section name="Solution" id="{832ab9a1-619d-2513-b871-a1b3db25a519}">
+        <p14:section name="Solution" id="{8bcc5858-d145-c235-e5b2-a38d9413e84b}">
           <p14:sldIdLst>
             <p14:sldId id="258"/>
+            <p14:sldId id="259"/>
           </p14:sldIdLst>
         </p14:section>
-        <p14:section name="Tech" id="{7099c1a4-5ca9-d179-ddca-07bf2e0c3a28}">
+        <p14:section name="Tech" id="{117a804b-da6a-1e9d-9fac-fbfca9f645fc}">
           <p14:sldIdLst>
-            <p14:sldId id="259"/>
             <p14:sldId id="260"/>
             <p14:sldId id="261"/>
-          </p14:sldIdLst>
-        </p14:section>
-        <p14:section name="Trust" id="{d3a815bd-0ca8-dab2-baf3-b78094f5ae16}">
-          <p14:sldIdLst>
             <p14:sldId id="262"/>
           </p14:sldIdLst>
         </p14:section>
-        <p14:section name="Close" id="{20476355-e7c6-9a4e-edd1-9fc40d5dbecc}">
+        <p14:section name="Trust" id="{4df64349-1521-38e7-5de1-dff8b17e9e8d}">
           <p14:sldIdLst>
             <p14:sldId id="263"/>
+          </p14:sldIdLst>
+        </p14:section>
+        <p14:section name="Close" id="{c8a2652d-d4ca-b16d-0a27-ff05ed6afd63}">
+          <p14:sldIdLst>
+            <p14:sldId id="264"/>
           </p14:sldIdLst>
         </p14:section>
       </p14:sectionLst>
@@ -814,7 +816,7 @@
           <a:p>
             <a:r>
               <a:rPr lang="en-US" dirty="0"/>
-              <a:t>Everything is free and open, so cost per analysis is zero. Emphasise that the statistics are standard and explainable: robust regression for the expected healthy curve, a bootstrap for the interval, change-point detection for the date, k-means for the damage zones.</a:t>
+              <a:t>This slide sets up the live result. State the documented event and its sources, then the rule: the demo field is the surest cropland (highest pre-flood canopy), not the most dramatic loss. Next slide, if you have run the case study, shows the real numbers and before/after images. If the run was limited by monsoon cloud, say so: that is exactly why the radar check exists.</a:t>
             </a:r>
             <a:endParaRPr lang="en-US" dirty="0"/>
           </a:p>
@@ -902,7 +904,7 @@
           <a:p>
             <a:r>
               <a:rPr lang="en-US" dirty="0"/>
-              <a:t>One line per card. If asked about accuracy: no figure is claimed until validation on documented events is complete; every result shows its confidence interval and the number of scenes used.</a:t>
+              <a:t>Everything is free and open, so cost per analysis is zero. Emphasise that the statistics are standard and explainable: robust regression for the expected healthy curve, a bootstrap for the interval, change-point detection for the date, k-means for the damage zones.</a:t>
             </a:r>
             <a:endParaRPr lang="en-US" dirty="0"/>
           </a:p>
@@ -990,7 +992,7 @@
           <a:p>
             <a:r>
               <a:rPr lang="en-US" dirty="0"/>
-              <a:t>Do not disparage dashboards: they answer a different question. Ours is event-conditioned and plot-level, and the output is something a farmer can submit: a signed report, the right claim route and deadline, and a letter in their language.</a:t>
+              <a:t>One line per card. If asked about accuracy: no figure is claimed until validation on documented events is complete; every result shows its confidence interval and the number of scenes used.</a:t>
             </a:r>
             <a:endParaRPr lang="en-US" dirty="0"/>
           </a:p>
@@ -1078,7 +1080,7 @@
           <a:p>
             <a:r>
               <a:rPr lang="en-US" dirty="0"/>
-              <a:t>Say the limits before a judge does. Real spot checks on three arbitrary dates reported 19.3, 14.1 and 13.7 percent apparent loss with intervals spanning zero, so losses below about 25 percent are not read as damage. That is n equals 3: a warning, not a false-positive rate. Quote the case-study controls from EVIDENCE.md as well. The validation script and table template are in the repository.</a:t>
+              <a:t>Do not disparage dashboards: they answer a different question. Ours is event-conditioned and plot-level, and the output is something a farmer can submit: a signed report, the right claim route and deadline, and a letter in their language.</a:t>
             </a:r>
             <a:endParaRPr lang="en-US" dirty="0"/>
           </a:p>
@@ -1166,7 +1168,7 @@
           <a:p>
             <a:r>
               <a:rPr lang="en-US" dirty="0"/>
-              <a:t>Close with the one-line summary and invite them to open the site. Mention the roadmap in one breath. Be ready for: accuracy, cloud cover in monsoon, why free data, and what the tool cannot do.</a:t>
+              <a:t>Say the limits before a judge does. Real spot checks on three arbitrary dates reported 19.3, 14.1 and 13.7 percent apparent loss with intervals spanning zero, so losses below about 25 percent are not read as damage. That is n equals 3: a warning, not a false-positive rate. Quote the case-study controls from EVIDENCE.md as well. The validation script and table template are in the repository.</a:t>
             </a:r>
             <a:endParaRPr lang="en-US" dirty="0"/>
           </a:p>
@@ -1190,6 +1192,94 @@
             <a:fld id="{F7021451-1387-4CA6-816F-3879F97B5CBC}" type="slidenum">
               <a:rPr lang="en-US"/>
               <a:t>8</a:t>
+            </a:fld>
+            <a:endParaRPr lang="en-US"/>
+          </a:p>
+        </p:txBody>
+      </p:sp>
+    </p:spTree>
+    <p:extLst>
+      <p:ext uri="{BB962C8B-B14F-4D97-AF65-F5344CB8AC3E}">
+        <p14:creationId xmlns:p14="http://schemas.microsoft.com/office/powerpoint/2010/main" val="1024086991"/>
+      </p:ext>
+    </p:extLst>
+  </p:cSld>
+  <p:clrMapOvr>
+    <a:masterClrMapping/>
+  </p:clrMapOvr>
+</p:notes>
+</file>
+
+<file path=ppt/notesSlides/notesSlide9.xml><?xml version="1.0" encoding="utf-8"?>
+<p:notes xmlns:a="http://schemas.openxmlformats.org/drawingml/2006/main" xmlns:r="http://schemas.openxmlformats.org/officeDocument/2006/relationships" xmlns:p="http://schemas.openxmlformats.org/presentationml/2006/main">
+  <p:cSld>
+    <p:spTree>
+      <p:nvGrpSpPr>
+        <p:cNvPr id="1" name=""/>
+        <p:cNvGrpSpPr/>
+        <p:nvPr/>
+      </p:nvGrpSpPr>
+      <p:grpSpPr>
+        <a:xfrm>
+          <a:off x="0" y="0"/>
+          <a:ext cx="0" cy="0"/>
+          <a:chOff x="0" y="0"/>
+          <a:chExt cx="0" cy="0"/>
+        </a:xfrm>
+      </p:grpSpPr>
+      <p:sp>
+        <p:nvSpPr>
+          <p:cNvPr id="2" name="Slide Image Placeholder 1"/>
+          <p:cNvSpPr>
+            <a:spLocks noGrp="1" noRot="1" noChangeAspect="1"/>
+          </p:cNvSpPr>
+          <p:nvPr>
+            <p:ph type="sldImg"/>
+          </p:nvPr>
+        </p:nvSpPr>
+        <p:spPr/>
+      </p:sp>
+      <p:sp>
+        <p:nvSpPr>
+          <p:cNvPr id="3" name="Notes Placeholder 2"/>
+          <p:cNvSpPr>
+            <a:spLocks noGrp="1"/>
+          </p:cNvSpPr>
+          <p:nvPr>
+            <p:ph type="body" idx="1"/>
+          </p:nvPr>
+        </p:nvSpPr>
+        <p:spPr/>
+        <p:txBody>
+          <a:bodyPr/>
+          <a:lstStyle/>
+          <a:p>
+            <a:r>
+              <a:rPr lang="en-US" dirty="0"/>
+              <a:t>Close with the one-line summary and invite them to open the site. Mention the roadmap in one breath. Be ready for: accuracy, cloud cover in monsoon, why free data, and what the tool cannot do.</a:t>
+            </a:r>
+            <a:endParaRPr lang="en-US" dirty="0"/>
+          </a:p>
+        </p:txBody>
+      </p:sp>
+      <p:sp>
+        <p:nvSpPr>
+          <p:cNvPr id="4" name="Slide Number Placeholder 3"/>
+          <p:cNvSpPr>
+            <a:spLocks noGrp="1"/>
+          </p:cNvSpPr>
+          <p:nvPr>
+            <p:ph type="sldNum" sz="quarter" idx="10"/>
+          </p:nvPr>
+        </p:nvSpPr>
+        <p:spPr/>
+        <p:txBody>
+          <a:bodyPr/>
+          <a:lstStyle/>
+          <a:p>
+            <a:fld id="{F7021451-1387-4CA6-816F-3879F97B5CBC}" type="slidenum">
+              <a:rPr lang="en-US"/>
+              <a:t>9</a:t>
             </a:fld>
             <a:endParaRPr lang="en-US"/>
           </a:p>
@@ -3414,7 +3504,7 @@
                   <a:schemeClr val="tx1"/>
                 </a:solidFill>
               </a:rPr>
-              <a:t>Free, open data end to end</a:t>
+              <a:t>A real, documented event</a:t>
             </a:r>
             <a:endParaRPr lang="en-US" sz="3600" dirty="0"/>
           </a:p>
@@ -3422,18 +3512,45 @@
       </p:sp>
       <p:sp>
         <p:nvSpPr>
-          <p:cNvPr id="3" name="Browser box"/>
+          <p:cNvPr id="3" name="Event card"/>
           <p:cNvSpPr/>
           <p:nvPr/>
         </p:nvSpPr>
         <p:spPr>
           <a:xfrm>
-            <a:off x="548640" y="1463040"/>
-            <a:ext cx="2468880" cy="1371600"/>
+            <a:off x="548640" y="1325880"/>
+            <a:ext cx="4114800" cy="3063240"/>
           </a:xfrm>
           <a:prstGeom prst="roundRect">
             <a:avLst>
-              <a:gd name="adj" fmla="val 6667"/>
+              <a:gd name="adj" fmla="val 3582"/>
+            </a:avLst>
+          </a:prstGeom>
+          <a:solidFill>
+            <a:schemeClr val="bg2"/>
+          </a:solidFill>
+          <a:ln w="12700">
+            <a:solidFill>
+              <a:schemeClr val="bg2"/>
+            </a:solidFill>
+            <a:prstDash val="solid"/>
+          </a:ln>
+        </p:spPr>
+      </p:sp>
+      <p:sp>
+        <p:nvSpPr>
+          <p:cNvPr id="4" name="Method card"/>
+          <p:cNvSpPr/>
+          <p:nvPr/>
+        </p:nvSpPr>
+        <p:spPr>
+          <a:xfrm>
+            <a:off x="4846320" y="1325880"/>
+            <a:ext cx="3749040" cy="3063240"/>
+          </a:xfrm>
+          <a:prstGeom prst="roundRect">
+            <a:avLst>
+              <a:gd name="adj" fmla="val 3582"/>
             </a:avLst>
           </a:prstGeom>
           <a:solidFill>
@@ -3449,50 +3566,14 @@
       </p:sp>
       <p:sp>
         <p:nvSpPr>
-          <p:cNvPr id="4" name="Text 2"/>
-          <p:cNvSpPr txBox="1"/>
-          <p:nvPr/>
-        </p:nvSpPr>
-        <p:spPr>
-          <a:xfrm>
-            <a:off x="685800" y="1572768"/>
-            <a:ext cx="2194560" cy="320040"/>
-          </a:xfrm>
-          <a:prstGeom prst="rect">
-            <a:avLst/>
-          </a:prstGeom>
-          <a:noFill/>
-          <a:ln/>
-        </p:spPr>
-        <p:txBody>
-          <a:bodyPr wrap="square" lIns="0" tIns="0" rIns="0" bIns="0" rtlCol="0" anchor="ctr"/>
-          <a:lstStyle/>
-          <a:p>
-            <a:pPr indent="0" marL="0">
-              <a:buNone/>
-            </a:pPr>
-            <a:r>
-              <a:rPr lang="en-US" sz="1600" b="1" dirty="0">
-                <a:solidFill>
-                  <a:schemeClr val="bg1"/>
-                </a:solidFill>
-              </a:rPr>
-              <a:t>Browser</a:t>
-            </a:r>
-            <a:endParaRPr lang="en-US" sz="1600" dirty="0"/>
-          </a:p>
-        </p:txBody>
-      </p:sp>
-      <p:sp>
-        <p:nvSpPr>
           <p:cNvPr id="5" name="Text 3"/>
           <p:cNvSpPr txBox="1"/>
           <p:nvPr/>
         </p:nvSpPr>
         <p:spPr>
           <a:xfrm>
-            <a:off x="685800" y="1920240"/>
-            <a:ext cx="2194560" cy="822960"/>
+            <a:off x="777240" y="1481328"/>
+            <a:ext cx="3657600" cy="548640"/>
           </a:xfrm>
           <a:prstGeom prst="rect">
             <a:avLst/>
@@ -3508,43 +3589,92 @@
               <a:buNone/>
             </a:pPr>
             <a:r>
-              <a:rPr lang="en-US" sz="1300" dirty="0">
-                <a:solidFill>
-                  <a:schemeClr val="bg2"/>
-                </a:solidFill>
-              </a:rPr>
-              <a:t>React + Vite PWA, Leaflet map, charts, offline queue</a:t>
-            </a:r>
-            <a:endParaRPr lang="en-US" sz="1300" dirty="0"/>
-          </a:p>
-        </p:txBody>
-      </p:sp>
-      <p:sp>
-        <p:nvSpPr>
-          <p:cNvPr id="6" name="API box"/>
-          <p:cNvSpPr/>
-          <p:nvPr/>
-        </p:nvSpPr>
-        <p:spPr>
-          <a:xfrm>
-            <a:off x="3520440" y="1463040"/>
-            <a:ext cx="2468880" cy="1371600"/>
-          </a:xfrm>
-          <a:prstGeom prst="roundRect">
-            <a:avLst>
-              <a:gd name="adj" fmla="val 6667"/>
-            </a:avLst>
-          </a:prstGeom>
-          <a:solidFill>
-            <a:schemeClr val="tx1"/>
-          </a:solidFill>
-          <a:ln w="12700">
-            <a:solidFill>
-              <a:schemeClr val="tx1"/>
-            </a:solidFill>
-            <a:prstDash val="solid"/>
-          </a:ln>
-        </p:spPr>
+              <a:rPr lang="en-US" sz="1700" b="1" dirty="0">
+                <a:solidFill>
+                  <a:schemeClr val="tx1"/>
+                </a:solidFill>
+              </a:rPr>
+              <a:t>Ravi flood, Ajnala, Punjab · from 27 Aug 2025</a:t>
+            </a:r>
+            <a:endParaRPr lang="en-US" sz="1700" dirty="0"/>
+          </a:p>
+        </p:txBody>
+      </p:sp>
+      <p:sp>
+        <p:nvSpPr>
+          <p:cNvPr id="6" name="Text 4"/>
+          <p:cNvSpPr txBox="1"/>
+          <p:nvPr/>
+        </p:nvSpPr>
+        <p:spPr>
+          <a:xfrm>
+            <a:off x="777240" y="2103120"/>
+            <a:ext cx="3657600" cy="1828800"/>
+          </a:xfrm>
+          <a:prstGeom prst="rect">
+            <a:avLst/>
+          </a:prstGeom>
+          <a:noFill/>
+          <a:ln/>
+        </p:spPr>
+        <p:txBody>
+          <a:bodyPr wrap="square" lIns="0" tIns="0" rIns="0" bIns="0" rtlCol="0" anchor="t"/>
+          <a:lstStyle/>
+          <a:p>
+            <a:pPr marL="342900" indent="-342900">
+              <a:spcAft>
+                <a:spcPts val="800"/>
+              </a:spcAft>
+              <a:buSzPct val="100000"/>
+              <a:buChar char="•"/>
+            </a:pPr>
+            <a:r>
+              <a:rPr lang="en-US" sz="1400" dirty="0">
+                <a:solidFill>
+                  <a:schemeClr val="tx2"/>
+                </a:solidFill>
+              </a:rPr>
+              <a:t>Nearly 23,000 ha of standing crops destroyed in Ajnala</a:t>
+            </a:r>
+            <a:endParaRPr lang="en-US" sz="1400" dirty="0"/>
+          </a:p>
+          <a:p>
+            <a:pPr marL="342900" indent="-342900">
+              <a:spcAft>
+                <a:spcPts val="800"/>
+              </a:spcAft>
+              <a:buSzPct val="100000"/>
+              <a:buChar char="•"/>
+            </a:pPr>
+            <a:r>
+              <a:rPr lang="en-US" sz="1400" dirty="0">
+                <a:solidFill>
+                  <a:schemeClr val="tx2"/>
+                </a:solidFill>
+              </a:rPr>
+              <a:t>Paddy on 3.47 lakh acres impacted across five districts</a:t>
+            </a:r>
+            <a:endParaRPr lang="en-US" sz="1400" dirty="0"/>
+          </a:p>
+          <a:p>
+            <a:pPr marL="342900" indent="-342900">
+              <a:spcAft>
+                <a:spcPts val="800"/>
+              </a:spcAft>
+              <a:buSzPct val="100000"/>
+              <a:buChar char="•"/>
+            </a:pPr>
+            <a:r>
+              <a:rPr lang="en-US" sz="1400" dirty="0">
+                <a:solidFill>
+                  <a:schemeClr val="tx2"/>
+                </a:solidFill>
+              </a:rPr>
+              <a:t>About 190 villages inundated in Ajnala and Lopoke</a:t>
+            </a:r>
+            <a:endParaRPr lang="en-US" sz="1400" dirty="0"/>
+          </a:p>
+        </p:txBody>
       </p:sp>
       <p:sp>
         <p:nvSpPr>
@@ -3554,8 +3684,8 @@
         </p:nvSpPr>
         <p:spPr>
           <a:xfrm>
-            <a:off x="3657600" y="1572768"/>
-            <a:ext cx="2194560" cy="320040"/>
+            <a:off x="777240" y="4005072"/>
+            <a:ext cx="3657600" cy="274320"/>
           </a:xfrm>
           <a:prstGeom prst="rect">
             <a:avLst/>
@@ -3571,14 +3701,14 @@
               <a:buNone/>
             </a:pPr>
             <a:r>
-              <a:rPr lang="en-US" sz="1600" b="1" dirty="0">
-                <a:solidFill>
-                  <a:schemeClr val="bg1"/>
-                </a:solidFill>
-              </a:rPr>
-              <a:t>API (Render)</a:t>
-            </a:r>
-            <a:endParaRPr lang="en-US" sz="1600" dirty="0"/>
+              <a:rPr lang="en-US" sz="1000" dirty="0">
+                <a:solidFill>
+                  <a:schemeClr val="tx2"/>
+                </a:solidFill>
+              </a:rPr>
+              <a:t>Sources: The Tribune and SPHERE India (full list in EVIDENCE.md)</a:t>
+            </a:r>
+            <a:endParaRPr lang="en-US" sz="1000" dirty="0"/>
           </a:p>
         </p:txBody>
       </p:sp>
@@ -3590,8 +3720,44 @@
         </p:nvSpPr>
         <p:spPr>
           <a:xfrm>
-            <a:off x="3657600" y="1920240"/>
-            <a:ext cx="2194560" cy="822960"/>
+            <a:off x="5074920" y="1481328"/>
+            <a:ext cx="3291840" cy="365760"/>
+          </a:xfrm>
+          <a:prstGeom prst="rect">
+            <a:avLst/>
+          </a:prstGeom>
+          <a:noFill/>
+          <a:ln/>
+        </p:spPr>
+        <p:txBody>
+          <a:bodyPr wrap="square" lIns="0" tIns="0" rIns="0" bIns="0" rtlCol="0" anchor="ctr"/>
+          <a:lstStyle/>
+          <a:p>
+            <a:pPr indent="0" marL="0">
+              <a:buNone/>
+            </a:pPr>
+            <a:r>
+              <a:rPr lang="en-US" sz="1800" b="1" dirty="0">
+                <a:solidFill>
+                  <a:schemeClr val="accent1"/>
+                </a:solidFill>
+              </a:rPr>
+              <a:t>No cherry-picking</a:t>
+            </a:r>
+            <a:endParaRPr lang="en-US" sz="1800" dirty="0"/>
+          </a:p>
+        </p:txBody>
+      </p:sp>
+      <p:sp>
+        <p:nvSpPr>
+          <p:cNvPr id="9" name="Text 7"/>
+          <p:cNvSpPr txBox="1"/>
+          <p:nvPr/>
+        </p:nvSpPr>
+        <p:spPr>
+          <a:xfrm>
+            <a:off x="5074920" y="2103120"/>
+            <a:ext cx="3291840" cy="2194560"/>
           </a:xfrm>
           <a:prstGeom prst="rect">
             <a:avLst/>
@@ -3603,464 +3769,58 @@
           <a:bodyPr wrap="square" lIns="0" tIns="0" rIns="0" bIns="0" rtlCol="0" anchor="t"/>
           <a:lstStyle/>
           <a:p>
-            <a:pPr indent="0" marL="0">
-              <a:buNone/>
-            </a:pPr>
-            <a:r>
-              <a:rPr lang="en-US" sz="1300" dirty="0">
-                <a:solidFill>
-                  <a:schemeClr val="bg2"/>
-                </a:solidFill>
-              </a:rPr>
-              <a:t>FastAPI in Docker: numpy, rasterio, Ed25519 signing</a:t>
-            </a:r>
-            <a:endParaRPr lang="en-US" sz="1300" dirty="0"/>
-          </a:p>
-        </p:txBody>
-      </p:sp>
-      <p:sp>
-        <p:nvSpPr>
-          <p:cNvPr id="9" name="Satellite box"/>
-          <p:cNvSpPr/>
-          <p:nvPr/>
-        </p:nvSpPr>
-        <p:spPr>
-          <a:xfrm>
-            <a:off x="6492240" y="1463040"/>
-            <a:ext cx="2103120" cy="1371600"/>
-          </a:xfrm>
-          <a:prstGeom prst="roundRect">
-            <a:avLst>
-              <a:gd name="adj" fmla="val 6667"/>
-            </a:avLst>
-          </a:prstGeom>
-          <a:solidFill>
-            <a:schemeClr val="accent6"/>
-          </a:solidFill>
-          <a:ln w="12700">
-            <a:solidFill>
-              <a:schemeClr val="accent6"/>
-            </a:solidFill>
-            <a:prstDash val="solid"/>
-          </a:ln>
-        </p:spPr>
-      </p:sp>
-      <p:sp>
-        <p:nvSpPr>
-          <p:cNvPr id="10" name="Text 8"/>
-          <p:cNvSpPr txBox="1"/>
-          <p:nvPr/>
-        </p:nvSpPr>
-        <p:spPr>
-          <a:xfrm>
-            <a:off x="6629400" y="1572768"/>
-            <a:ext cx="1828800" cy="320040"/>
-          </a:xfrm>
-          <a:prstGeom prst="rect">
-            <a:avLst/>
-          </a:prstGeom>
-          <a:noFill/>
-          <a:ln/>
-        </p:spPr>
-        <p:txBody>
-          <a:bodyPr wrap="square" lIns="0" tIns="0" rIns="0" bIns="0" rtlCol="0" anchor="ctr"/>
-          <a:lstStyle/>
-          <a:p>
-            <a:pPr indent="0" marL="0">
-              <a:buNone/>
-            </a:pPr>
-            <a:r>
-              <a:rPr lang="en-US" sz="1600" b="1" dirty="0">
+            <a:pPr marL="342900" indent="-342900">
+              <a:spcAft>
+                <a:spcPts val="800"/>
+              </a:spcAft>
+              <a:buSzPct val="100000"/>
+              <a:buChar char="•"/>
+            </a:pPr>
+            <a:r>
+              <a:rPr lang="en-US" sz="1400" dirty="0">
                 <a:solidFill>
                   <a:schemeClr val="bg1"/>
                 </a:solidFill>
               </a:rPr>
-              <a:t>Sentinel-2</a:t>
-            </a:r>
-            <a:endParaRPr lang="en-US" sz="1600" dirty="0"/>
-          </a:p>
-        </p:txBody>
-      </p:sp>
-      <p:sp>
-        <p:nvSpPr>
-          <p:cNvPr id="11" name="Text 9"/>
-          <p:cNvSpPr txBox="1"/>
-          <p:nvPr/>
-        </p:nvSpPr>
-        <p:spPr>
-          <a:xfrm>
-            <a:off x="6629400" y="1920240"/>
-            <a:ext cx="1828800" cy="822960"/>
-          </a:xfrm>
-          <a:prstGeom prst="rect">
-            <a:avLst/>
-          </a:prstGeom>
-          <a:noFill/>
-          <a:ln/>
-        </p:spPr>
-        <p:txBody>
-          <a:bodyPr wrap="square" lIns="0" tIns="0" rIns="0" bIns="0" rtlCol="0" anchor="t"/>
-          <a:lstStyle/>
-          <a:p>
-            <a:pPr indent="0" marL="0">
-              <a:buNone/>
-            </a:pPr>
-            <a:r>
-              <a:rPr lang="en-US" sz="1300" dirty="0">
-                <a:solidFill>
-                  <a:schemeClr val="bg2"/>
-                </a:solidFill>
-              </a:rPr>
-              <a:t>ESA open data on AWS, 10 m, about 5 days</a:t>
-            </a:r>
-            <a:endParaRPr lang="en-US" sz="1300" dirty="0"/>
-          </a:p>
-        </p:txBody>
-      </p:sp>
-      <p:sp>
-        <p:nvSpPr>
-          <p:cNvPr id="12" name="Arrow A"/>
-          <p:cNvSpPr/>
-          <p:nvPr/>
-        </p:nvSpPr>
-        <p:spPr>
-          <a:xfrm>
-            <a:off x="3063240" y="2011680"/>
-            <a:ext cx="411480" cy="274320"/>
-          </a:xfrm>
-          <a:prstGeom prst="rightArrow">
-            <a:avLst/>
-          </a:prstGeom>
-          <a:solidFill>
-            <a:schemeClr val="accent1"/>
-          </a:solidFill>
-          <a:ln w="12700">
-            <a:solidFill>
-              <a:schemeClr val="accent1"/>
-            </a:solidFill>
-            <a:prstDash val="solid"/>
-          </a:ln>
-        </p:spPr>
-      </p:sp>
-      <p:sp>
-        <p:nvSpPr>
-          <p:cNvPr id="13" name="Arrow B"/>
-          <p:cNvSpPr/>
-          <p:nvPr/>
-        </p:nvSpPr>
-        <p:spPr>
-          <a:xfrm>
-            <a:off x="6035040" y="2011680"/>
-            <a:ext cx="411480" cy="274320"/>
-          </a:xfrm>
-          <a:prstGeom prst="rightArrow">
-            <a:avLst/>
-          </a:prstGeom>
-          <a:solidFill>
-            <a:schemeClr val="accent1"/>
-          </a:solidFill>
-          <a:ln w="12700">
-            <a:solidFill>
-              <a:schemeClr val="accent1"/>
-            </a:solidFill>
-            <a:prstDash val="solid"/>
-          </a:ln>
-        </p:spPr>
-      </p:sp>
-      <p:sp>
-        <p:nvSpPr>
-          <p:cNvPr id="14" name="Support 1"/>
-          <p:cNvSpPr/>
-          <p:nvPr/>
-        </p:nvSpPr>
-        <p:spPr>
-          <a:xfrm>
-            <a:off x="548640" y="3200400"/>
-            <a:ext cx="2560320" cy="1188720"/>
-          </a:xfrm>
-          <a:prstGeom prst="roundRect">
-            <a:avLst>
-              <a:gd name="adj" fmla="val 9231"/>
-            </a:avLst>
-          </a:prstGeom>
-          <a:solidFill>
-            <a:schemeClr val="bg2"/>
-          </a:solidFill>
-          <a:ln w="12700">
-            <a:solidFill>
-              <a:schemeClr val="bg2"/>
-            </a:solidFill>
-            <a:prstDash val="solid"/>
-          </a:ln>
-        </p:spPr>
-      </p:sp>
-      <p:sp>
-        <p:nvSpPr>
-          <p:cNvPr id="15" name="Text 13"/>
-          <p:cNvSpPr txBox="1"/>
-          <p:nvPr/>
-        </p:nvSpPr>
-        <p:spPr>
-          <a:xfrm>
-            <a:off x="731520" y="3310128"/>
-            <a:ext cx="2194560" cy="320040"/>
-          </a:xfrm>
-          <a:prstGeom prst="rect">
-            <a:avLst/>
-          </a:prstGeom>
-          <a:noFill/>
-          <a:ln/>
-        </p:spPr>
-        <p:txBody>
-          <a:bodyPr wrap="square" lIns="0" tIns="0" rIns="0" bIns="0" rtlCol="0" anchor="ctr"/>
-          <a:lstStyle/>
-          <a:p>
-            <a:pPr indent="0" marL="0">
-              <a:buNone/>
-            </a:pPr>
-            <a:r>
-              <a:rPr lang="en-US" sz="1600" b="1" dirty="0">
-                <a:solidFill>
-                  <a:schemeClr val="tx1"/>
-                </a:solidFill>
-              </a:rPr>
-              <a:t>Open-Meteo</a:t>
-            </a:r>
-            <a:endParaRPr lang="en-US" sz="1600" dirty="0"/>
-          </a:p>
-        </p:txBody>
-      </p:sp>
-      <p:sp>
-        <p:nvSpPr>
-          <p:cNvPr id="16" name="Text 14"/>
-          <p:cNvSpPr txBox="1"/>
-          <p:nvPr/>
-        </p:nvSpPr>
-        <p:spPr>
-          <a:xfrm>
-            <a:off x="731520" y="3675888"/>
-            <a:ext cx="2194560" cy="640080"/>
-          </a:xfrm>
-          <a:prstGeom prst="rect">
-            <a:avLst/>
-          </a:prstGeom>
-          <a:noFill/>
-          <a:ln/>
-        </p:spPr>
-        <p:txBody>
-          <a:bodyPr wrap="square" lIns="0" tIns="0" rIns="0" bIns="0" rtlCol="0" anchor="t"/>
-          <a:lstStyle/>
-          <a:p>
-            <a:pPr indent="0" marL="0">
-              <a:buNone/>
-            </a:pPr>
-            <a:r>
-              <a:rPr lang="en-US" sz="1300" dirty="0">
-                <a:solidFill>
-                  <a:schemeClr val="tx2"/>
-                </a:solidFill>
-              </a:rPr>
-              <a:t>Geocoding, weather and 10-year rain history</a:t>
-            </a:r>
-            <a:endParaRPr lang="en-US" sz="1300" dirty="0"/>
-          </a:p>
-        </p:txBody>
-      </p:sp>
-      <p:sp>
-        <p:nvSpPr>
-          <p:cNvPr id="17" name="Support 2"/>
-          <p:cNvSpPr/>
-          <p:nvPr/>
-        </p:nvSpPr>
-        <p:spPr>
-          <a:xfrm>
-            <a:off x="3291840" y="3200400"/>
-            <a:ext cx="2560320" cy="1188720"/>
-          </a:xfrm>
-          <a:prstGeom prst="roundRect">
-            <a:avLst>
-              <a:gd name="adj" fmla="val 9231"/>
-            </a:avLst>
-          </a:prstGeom>
-          <a:solidFill>
-            <a:schemeClr val="bg2"/>
-          </a:solidFill>
-          <a:ln w="12700">
-            <a:solidFill>
-              <a:schemeClr val="bg2"/>
-            </a:solidFill>
-            <a:prstDash val="solid"/>
-          </a:ln>
-        </p:spPr>
-      </p:sp>
-      <p:sp>
-        <p:nvSpPr>
-          <p:cNvPr id="18" name="Text 16"/>
-          <p:cNvSpPr txBox="1"/>
-          <p:nvPr/>
-        </p:nvSpPr>
-        <p:spPr>
-          <a:xfrm>
-            <a:off x="3474720" y="3310128"/>
-            <a:ext cx="2194560" cy="320040"/>
-          </a:xfrm>
-          <a:prstGeom prst="rect">
-            <a:avLst/>
-          </a:prstGeom>
-          <a:noFill/>
-          <a:ln/>
-        </p:spPr>
-        <p:txBody>
-          <a:bodyPr wrap="square" lIns="0" tIns="0" rIns="0" bIns="0" rtlCol="0" anchor="ctr"/>
-          <a:lstStyle/>
-          <a:p>
-            <a:pPr indent="0" marL="0">
-              <a:buNone/>
-            </a:pPr>
-            <a:r>
-              <a:rPr lang="en-US" sz="1600" b="1" dirty="0">
-                <a:solidFill>
-                  <a:schemeClr val="tx1"/>
-                </a:solidFill>
-              </a:rPr>
-              <a:t>Statistics</a:t>
-            </a:r>
-            <a:endParaRPr lang="en-US" sz="1600" dirty="0"/>
-          </a:p>
-        </p:txBody>
-      </p:sp>
-      <p:sp>
-        <p:nvSpPr>
-          <p:cNvPr id="19" name="Text 17"/>
-          <p:cNvSpPr txBox="1"/>
-          <p:nvPr/>
-        </p:nvSpPr>
-        <p:spPr>
-          <a:xfrm>
-            <a:off x="3474720" y="3675888"/>
-            <a:ext cx="2194560" cy="640080"/>
-          </a:xfrm>
-          <a:prstGeom prst="rect">
-            <a:avLst/>
-          </a:prstGeom>
-          <a:noFill/>
-          <a:ln/>
-        </p:spPr>
-        <p:txBody>
-          <a:bodyPr wrap="square" lIns="0" tIns="0" rIns="0" bIns="0" rtlCol="0" anchor="t"/>
-          <a:lstStyle/>
-          <a:p>
-            <a:pPr indent="0" marL="0">
-              <a:buNone/>
-            </a:pPr>
-            <a:r>
-              <a:rPr lang="en-US" sz="1300" dirty="0">
-                <a:solidFill>
-                  <a:schemeClr val="tx2"/>
-                </a:solidFill>
-              </a:rPr>
-              <a:t>Theil-Sen, bootstrap, change-point, k-means</a:t>
-            </a:r>
-            <a:endParaRPr lang="en-US" sz="1300" dirty="0"/>
-          </a:p>
-        </p:txBody>
-      </p:sp>
-      <p:sp>
-        <p:nvSpPr>
-          <p:cNvPr id="20" name="Support 3"/>
-          <p:cNvSpPr/>
-          <p:nvPr/>
-        </p:nvSpPr>
-        <p:spPr>
-          <a:xfrm>
-            <a:off x="6035040" y="3200400"/>
-            <a:ext cx="2560320" cy="1188720"/>
-          </a:xfrm>
-          <a:prstGeom prst="roundRect">
-            <a:avLst>
-              <a:gd name="adj" fmla="val 9231"/>
-            </a:avLst>
-          </a:prstGeom>
-          <a:solidFill>
-            <a:schemeClr val="bg2"/>
-          </a:solidFill>
-          <a:ln w="12700">
-            <a:solidFill>
-              <a:schemeClr val="bg2"/>
-            </a:solidFill>
-            <a:prstDash val="solid"/>
-          </a:ln>
-        </p:spPr>
-      </p:sp>
-      <p:sp>
-        <p:nvSpPr>
-          <p:cNvPr id="21" name="Text 19"/>
-          <p:cNvSpPr txBox="1"/>
-          <p:nvPr/>
-        </p:nvSpPr>
-        <p:spPr>
-          <a:xfrm>
-            <a:off x="6217920" y="3310128"/>
-            <a:ext cx="2194560" cy="320040"/>
-          </a:xfrm>
-          <a:prstGeom prst="rect">
-            <a:avLst/>
-          </a:prstGeom>
-          <a:noFill/>
-          <a:ln/>
-        </p:spPr>
-        <p:txBody>
-          <a:bodyPr wrap="square" lIns="0" tIns="0" rIns="0" bIns="0" rtlCol="0" anchor="ctr"/>
-          <a:lstStyle/>
-          <a:p>
-            <a:pPr indent="0" marL="0">
-              <a:buNone/>
-            </a:pPr>
-            <a:r>
-              <a:rPr lang="en-US" sz="1600" b="1" dirty="0">
-                <a:solidFill>
-                  <a:schemeClr val="tx1"/>
-                </a:solidFill>
-              </a:rPr>
-              <a:t>Hosting</a:t>
-            </a:r>
-            <a:endParaRPr lang="en-US" sz="1600" dirty="0"/>
-          </a:p>
-        </p:txBody>
-      </p:sp>
-      <p:sp>
-        <p:nvSpPr>
-          <p:cNvPr id="22" name="Text 20"/>
-          <p:cNvSpPr txBox="1"/>
-          <p:nvPr/>
-        </p:nvSpPr>
-        <p:spPr>
-          <a:xfrm>
-            <a:off x="6217920" y="3675888"/>
-            <a:ext cx="2194560" cy="640080"/>
-          </a:xfrm>
-          <a:prstGeom prst="rect">
-            <a:avLst/>
-          </a:prstGeom>
-          <a:noFill/>
-          <a:ln/>
-        </p:spPr>
-        <p:txBody>
-          <a:bodyPr wrap="square" lIns="0" tIns="0" rIns="0" bIns="0" rtlCol="0" anchor="t"/>
-          <a:lstStyle/>
-          <a:p>
-            <a:pPr indent="0" marL="0">
-              <a:buNone/>
-            </a:pPr>
-            <a:r>
-              <a:rPr lang="en-US" sz="1300" dirty="0">
-                <a:solidFill>
-                  <a:schemeClr val="tx2"/>
-                </a:solidFill>
-              </a:rPr>
-              <a:t>GitHub Pages and Render, CI with pytest and Node tests</a:t>
-            </a:r>
-            <a:endParaRPr lang="en-US" sz="1300" dirty="0"/>
+              <a:t>Field chosen by a rule fixed in advance: highest pre-flood canopy</a:t>
+            </a:r>
+            <a:endParaRPr lang="en-US" sz="1400" dirty="0"/>
+          </a:p>
+          <a:p>
+            <a:pPr marL="342900" indent="-342900">
+              <a:spcAft>
+                <a:spcPts val="800"/>
+              </a:spcAft>
+              <a:buSzPct val="100000"/>
+              <a:buChar char="•"/>
+            </a:pPr>
+            <a:r>
+              <a:rPr lang="en-US" sz="1400" dirty="0">
+                <a:solidFill>
+                  <a:schemeClr val="bg1"/>
+                </a:solidFill>
+              </a:rPr>
+              <a:t>All five candidate points reported, including failures</a:t>
+            </a:r>
+            <a:endParaRPr lang="en-US" sz="1400" dirty="0"/>
+          </a:p>
+          <a:p>
+            <a:pPr marL="342900" indent="-342900">
+              <a:spcAft>
+                <a:spcPts val="800"/>
+              </a:spcAft>
+              <a:buSzPct val="100000"/>
+              <a:buChar char="•"/>
+            </a:pPr>
+            <a:r>
+              <a:rPr lang="en-US" sz="1400" dirty="0">
+                <a:solidFill>
+                  <a:schemeClr val="bg1"/>
+                </a:solidFill>
+              </a:rPr>
+              <a:t>Same point in earlier seasons as false-positive controls</a:t>
+            </a:r>
+            <a:endParaRPr lang="en-US" sz="1400" dirty="0"/>
           </a:p>
         </p:txBody>
       </p:sp>
@@ -4166,7 +3926,7 @@
                   <a:schemeClr val="tx1"/>
                 </a:solidFill>
               </a:rPr>
-              <a:t>What the farmer gets</a:t>
+              <a:t>Free, open data end to end</a:t>
             </a:r>
             <a:endParaRPr lang="en-US" sz="3600" dirty="0"/>
           </a:p>
@@ -4174,18 +3934,365 @@
       </p:sp>
       <p:sp>
         <p:nvSpPr>
-          <p:cNvPr id="3" name="Feature 1"/>
+          <p:cNvPr id="3" name="Browser box"/>
           <p:cNvSpPr/>
           <p:nvPr/>
         </p:nvSpPr>
         <p:spPr>
           <a:xfrm>
-            <a:off x="548640" y="1371600"/>
-            <a:ext cx="2560320" cy="1463040"/>
+            <a:off x="548640" y="1463040"/>
+            <a:ext cx="2468880" cy="1371600"/>
           </a:xfrm>
           <a:prstGeom prst="roundRect">
             <a:avLst>
-              <a:gd name="adj" fmla="val 7500"/>
+              <a:gd name="adj" fmla="val 6667"/>
+            </a:avLst>
+          </a:prstGeom>
+          <a:solidFill>
+            <a:schemeClr val="tx1"/>
+          </a:solidFill>
+          <a:ln w="12700">
+            <a:solidFill>
+              <a:schemeClr val="tx1"/>
+            </a:solidFill>
+            <a:prstDash val="solid"/>
+          </a:ln>
+        </p:spPr>
+      </p:sp>
+      <p:sp>
+        <p:nvSpPr>
+          <p:cNvPr id="4" name="Text 2"/>
+          <p:cNvSpPr txBox="1"/>
+          <p:nvPr/>
+        </p:nvSpPr>
+        <p:spPr>
+          <a:xfrm>
+            <a:off x="685800" y="1572768"/>
+            <a:ext cx="2194560" cy="320040"/>
+          </a:xfrm>
+          <a:prstGeom prst="rect">
+            <a:avLst/>
+          </a:prstGeom>
+          <a:noFill/>
+          <a:ln/>
+        </p:spPr>
+        <p:txBody>
+          <a:bodyPr wrap="square" lIns="0" tIns="0" rIns="0" bIns="0" rtlCol="0" anchor="ctr"/>
+          <a:lstStyle/>
+          <a:p>
+            <a:pPr indent="0" marL="0">
+              <a:buNone/>
+            </a:pPr>
+            <a:r>
+              <a:rPr lang="en-US" sz="1600" b="1" dirty="0">
+                <a:solidFill>
+                  <a:schemeClr val="bg1"/>
+                </a:solidFill>
+              </a:rPr>
+              <a:t>Browser</a:t>
+            </a:r>
+            <a:endParaRPr lang="en-US" sz="1600" dirty="0"/>
+          </a:p>
+        </p:txBody>
+      </p:sp>
+      <p:sp>
+        <p:nvSpPr>
+          <p:cNvPr id="5" name="Text 3"/>
+          <p:cNvSpPr txBox="1"/>
+          <p:nvPr/>
+        </p:nvSpPr>
+        <p:spPr>
+          <a:xfrm>
+            <a:off x="685800" y="1920240"/>
+            <a:ext cx="2194560" cy="822960"/>
+          </a:xfrm>
+          <a:prstGeom prst="rect">
+            <a:avLst/>
+          </a:prstGeom>
+          <a:noFill/>
+          <a:ln/>
+        </p:spPr>
+        <p:txBody>
+          <a:bodyPr wrap="square" lIns="0" tIns="0" rIns="0" bIns="0" rtlCol="0" anchor="t"/>
+          <a:lstStyle/>
+          <a:p>
+            <a:pPr indent="0" marL="0">
+              <a:buNone/>
+            </a:pPr>
+            <a:r>
+              <a:rPr lang="en-US" sz="1300" dirty="0">
+                <a:solidFill>
+                  <a:schemeClr val="bg2"/>
+                </a:solidFill>
+              </a:rPr>
+              <a:t>React + Vite PWA, Leaflet map, charts, offline queue</a:t>
+            </a:r>
+            <a:endParaRPr lang="en-US" sz="1300" dirty="0"/>
+          </a:p>
+        </p:txBody>
+      </p:sp>
+      <p:sp>
+        <p:nvSpPr>
+          <p:cNvPr id="6" name="API box"/>
+          <p:cNvSpPr/>
+          <p:nvPr/>
+        </p:nvSpPr>
+        <p:spPr>
+          <a:xfrm>
+            <a:off x="3520440" y="1463040"/>
+            <a:ext cx="2468880" cy="1371600"/>
+          </a:xfrm>
+          <a:prstGeom prst="roundRect">
+            <a:avLst>
+              <a:gd name="adj" fmla="val 6667"/>
+            </a:avLst>
+          </a:prstGeom>
+          <a:solidFill>
+            <a:schemeClr val="tx1"/>
+          </a:solidFill>
+          <a:ln w="12700">
+            <a:solidFill>
+              <a:schemeClr val="tx1"/>
+            </a:solidFill>
+            <a:prstDash val="solid"/>
+          </a:ln>
+        </p:spPr>
+      </p:sp>
+      <p:sp>
+        <p:nvSpPr>
+          <p:cNvPr id="7" name="Text 5"/>
+          <p:cNvSpPr txBox="1"/>
+          <p:nvPr/>
+        </p:nvSpPr>
+        <p:spPr>
+          <a:xfrm>
+            <a:off x="3657600" y="1572768"/>
+            <a:ext cx="2194560" cy="320040"/>
+          </a:xfrm>
+          <a:prstGeom prst="rect">
+            <a:avLst/>
+          </a:prstGeom>
+          <a:noFill/>
+          <a:ln/>
+        </p:spPr>
+        <p:txBody>
+          <a:bodyPr wrap="square" lIns="0" tIns="0" rIns="0" bIns="0" rtlCol="0" anchor="ctr"/>
+          <a:lstStyle/>
+          <a:p>
+            <a:pPr indent="0" marL="0">
+              <a:buNone/>
+            </a:pPr>
+            <a:r>
+              <a:rPr lang="en-US" sz="1600" b="1" dirty="0">
+                <a:solidFill>
+                  <a:schemeClr val="bg1"/>
+                </a:solidFill>
+              </a:rPr>
+              <a:t>API (Render)</a:t>
+            </a:r>
+            <a:endParaRPr lang="en-US" sz="1600" dirty="0"/>
+          </a:p>
+        </p:txBody>
+      </p:sp>
+      <p:sp>
+        <p:nvSpPr>
+          <p:cNvPr id="8" name="Text 6"/>
+          <p:cNvSpPr txBox="1"/>
+          <p:nvPr/>
+        </p:nvSpPr>
+        <p:spPr>
+          <a:xfrm>
+            <a:off x="3657600" y="1920240"/>
+            <a:ext cx="2194560" cy="822960"/>
+          </a:xfrm>
+          <a:prstGeom prst="rect">
+            <a:avLst/>
+          </a:prstGeom>
+          <a:noFill/>
+          <a:ln/>
+        </p:spPr>
+        <p:txBody>
+          <a:bodyPr wrap="square" lIns="0" tIns="0" rIns="0" bIns="0" rtlCol="0" anchor="t"/>
+          <a:lstStyle/>
+          <a:p>
+            <a:pPr indent="0" marL="0">
+              <a:buNone/>
+            </a:pPr>
+            <a:r>
+              <a:rPr lang="en-US" sz="1300" dirty="0">
+                <a:solidFill>
+                  <a:schemeClr val="bg2"/>
+                </a:solidFill>
+              </a:rPr>
+              <a:t>FastAPI in Docker: numpy, rasterio, Ed25519 signing</a:t>
+            </a:r>
+            <a:endParaRPr lang="en-US" sz="1300" dirty="0"/>
+          </a:p>
+        </p:txBody>
+      </p:sp>
+      <p:sp>
+        <p:nvSpPr>
+          <p:cNvPr id="9" name="Satellite box"/>
+          <p:cNvSpPr/>
+          <p:nvPr/>
+        </p:nvSpPr>
+        <p:spPr>
+          <a:xfrm>
+            <a:off x="6492240" y="1463040"/>
+            <a:ext cx="2103120" cy="1371600"/>
+          </a:xfrm>
+          <a:prstGeom prst="roundRect">
+            <a:avLst>
+              <a:gd name="adj" fmla="val 6667"/>
+            </a:avLst>
+          </a:prstGeom>
+          <a:solidFill>
+            <a:schemeClr val="accent6"/>
+          </a:solidFill>
+          <a:ln w="12700">
+            <a:solidFill>
+              <a:schemeClr val="accent6"/>
+            </a:solidFill>
+            <a:prstDash val="solid"/>
+          </a:ln>
+        </p:spPr>
+      </p:sp>
+      <p:sp>
+        <p:nvSpPr>
+          <p:cNvPr id="10" name="Text 8"/>
+          <p:cNvSpPr txBox="1"/>
+          <p:nvPr/>
+        </p:nvSpPr>
+        <p:spPr>
+          <a:xfrm>
+            <a:off x="6629400" y="1572768"/>
+            <a:ext cx="1828800" cy="320040"/>
+          </a:xfrm>
+          <a:prstGeom prst="rect">
+            <a:avLst/>
+          </a:prstGeom>
+          <a:noFill/>
+          <a:ln/>
+        </p:spPr>
+        <p:txBody>
+          <a:bodyPr wrap="square" lIns="0" tIns="0" rIns="0" bIns="0" rtlCol="0" anchor="ctr"/>
+          <a:lstStyle/>
+          <a:p>
+            <a:pPr indent="0" marL="0">
+              <a:buNone/>
+            </a:pPr>
+            <a:r>
+              <a:rPr lang="en-US" sz="1600" b="1" dirty="0">
+                <a:solidFill>
+                  <a:schemeClr val="bg1"/>
+                </a:solidFill>
+              </a:rPr>
+              <a:t>Sentinel-2</a:t>
+            </a:r>
+            <a:endParaRPr lang="en-US" sz="1600" dirty="0"/>
+          </a:p>
+        </p:txBody>
+      </p:sp>
+      <p:sp>
+        <p:nvSpPr>
+          <p:cNvPr id="11" name="Text 9"/>
+          <p:cNvSpPr txBox="1"/>
+          <p:nvPr/>
+        </p:nvSpPr>
+        <p:spPr>
+          <a:xfrm>
+            <a:off x="6629400" y="1920240"/>
+            <a:ext cx="1828800" cy="822960"/>
+          </a:xfrm>
+          <a:prstGeom prst="rect">
+            <a:avLst/>
+          </a:prstGeom>
+          <a:noFill/>
+          <a:ln/>
+        </p:spPr>
+        <p:txBody>
+          <a:bodyPr wrap="square" lIns="0" tIns="0" rIns="0" bIns="0" rtlCol="0" anchor="t"/>
+          <a:lstStyle/>
+          <a:p>
+            <a:pPr indent="0" marL="0">
+              <a:buNone/>
+            </a:pPr>
+            <a:r>
+              <a:rPr lang="en-US" sz="1300" dirty="0">
+                <a:solidFill>
+                  <a:schemeClr val="bg2"/>
+                </a:solidFill>
+              </a:rPr>
+              <a:t>ESA open data on AWS, 10 m, about 5 days</a:t>
+            </a:r>
+            <a:endParaRPr lang="en-US" sz="1300" dirty="0"/>
+          </a:p>
+        </p:txBody>
+      </p:sp>
+      <p:sp>
+        <p:nvSpPr>
+          <p:cNvPr id="12" name="Arrow A"/>
+          <p:cNvSpPr/>
+          <p:nvPr/>
+        </p:nvSpPr>
+        <p:spPr>
+          <a:xfrm>
+            <a:off x="3063240" y="2011680"/>
+            <a:ext cx="411480" cy="274320"/>
+          </a:xfrm>
+          <a:prstGeom prst="rightArrow">
+            <a:avLst/>
+          </a:prstGeom>
+          <a:solidFill>
+            <a:schemeClr val="accent1"/>
+          </a:solidFill>
+          <a:ln w="12700">
+            <a:solidFill>
+              <a:schemeClr val="accent1"/>
+            </a:solidFill>
+            <a:prstDash val="solid"/>
+          </a:ln>
+        </p:spPr>
+      </p:sp>
+      <p:sp>
+        <p:nvSpPr>
+          <p:cNvPr id="13" name="Arrow B"/>
+          <p:cNvSpPr/>
+          <p:nvPr/>
+        </p:nvSpPr>
+        <p:spPr>
+          <a:xfrm>
+            <a:off x="6035040" y="2011680"/>
+            <a:ext cx="411480" cy="274320"/>
+          </a:xfrm>
+          <a:prstGeom prst="rightArrow">
+            <a:avLst/>
+          </a:prstGeom>
+          <a:solidFill>
+            <a:schemeClr val="accent1"/>
+          </a:solidFill>
+          <a:ln w="12700">
+            <a:solidFill>
+              <a:schemeClr val="accent1"/>
+            </a:solidFill>
+            <a:prstDash val="solid"/>
+          </a:ln>
+        </p:spPr>
+      </p:sp>
+      <p:sp>
+        <p:nvSpPr>
+          <p:cNvPr id="14" name="Support 1"/>
+          <p:cNvSpPr/>
+          <p:nvPr/>
+        </p:nvSpPr>
+        <p:spPr>
+          <a:xfrm>
+            <a:off x="548640" y="3200400"/>
+            <a:ext cx="2560320" cy="1188720"/>
+          </a:xfrm>
+          <a:prstGeom prst="roundRect">
+            <a:avLst>
+              <a:gd name="adj" fmla="val 9231"/>
             </a:avLst>
           </a:prstGeom>
           <a:solidFill>
@@ -4201,139 +4308,90 @@
       </p:sp>
       <p:sp>
         <p:nvSpPr>
-          <p:cNvPr id="4" name="Loss with a range badge"/>
+          <p:cNvPr id="15" name="Text 13"/>
+          <p:cNvSpPr txBox="1"/>
+          <p:nvPr/>
+        </p:nvSpPr>
+        <p:spPr>
+          <a:xfrm>
+            <a:off x="731520" y="3310128"/>
+            <a:ext cx="2194560" cy="320040"/>
+          </a:xfrm>
+          <a:prstGeom prst="rect">
+            <a:avLst/>
+          </a:prstGeom>
+          <a:noFill/>
+          <a:ln/>
+        </p:spPr>
+        <p:txBody>
+          <a:bodyPr wrap="square" lIns="0" tIns="0" rIns="0" bIns="0" rtlCol="0" anchor="ctr"/>
+          <a:lstStyle/>
+          <a:p>
+            <a:pPr indent="0" marL="0">
+              <a:buNone/>
+            </a:pPr>
+            <a:r>
+              <a:rPr lang="en-US" sz="1600" b="1" dirty="0">
+                <a:solidFill>
+                  <a:schemeClr val="tx1"/>
+                </a:solidFill>
+              </a:rPr>
+              <a:t>Open-Meteo</a:t>
+            </a:r>
+            <a:endParaRPr lang="en-US" sz="1600" dirty="0"/>
+          </a:p>
+        </p:txBody>
+      </p:sp>
+      <p:sp>
+        <p:nvSpPr>
+          <p:cNvPr id="16" name="Text 14"/>
+          <p:cNvSpPr txBox="1"/>
+          <p:nvPr/>
+        </p:nvSpPr>
+        <p:spPr>
+          <a:xfrm>
+            <a:off x="731520" y="3675888"/>
+            <a:ext cx="2194560" cy="640080"/>
+          </a:xfrm>
+          <a:prstGeom prst="rect">
+            <a:avLst/>
+          </a:prstGeom>
+          <a:noFill/>
+          <a:ln/>
+        </p:spPr>
+        <p:txBody>
+          <a:bodyPr wrap="square" lIns="0" tIns="0" rIns="0" bIns="0" rtlCol="0" anchor="t"/>
+          <a:lstStyle/>
+          <a:p>
+            <a:pPr indent="0" marL="0">
+              <a:buNone/>
+            </a:pPr>
+            <a:r>
+              <a:rPr lang="en-US" sz="1300" dirty="0">
+                <a:solidFill>
+                  <a:schemeClr val="tx2"/>
+                </a:solidFill>
+              </a:rPr>
+              <a:t>Geocoding, weather and 10-year rain history</a:t>
+            </a:r>
+            <a:endParaRPr lang="en-US" sz="1300" dirty="0"/>
+          </a:p>
+        </p:txBody>
+      </p:sp>
+      <p:sp>
+        <p:nvSpPr>
+          <p:cNvPr id="17" name="Support 2"/>
           <p:cNvSpPr/>
           <p:nvPr/>
         </p:nvSpPr>
         <p:spPr>
           <a:xfrm>
-            <a:off x="731520" y="1554480"/>
-            <a:ext cx="502920" cy="502920"/>
-          </a:xfrm>
-          <a:prstGeom prst="ellipse">
-            <a:avLst/>
-          </a:prstGeom>
-          <a:solidFill>
-            <a:schemeClr val="tx1"/>
-          </a:solidFill>
-          <a:ln w="12700">
-            <a:solidFill>
-              <a:schemeClr val="tx1"/>
-            </a:solidFill>
-            <a:prstDash val="solid"/>
-          </a:ln>
-        </p:spPr>
-      </p:sp>
-      <p:pic>
-        <p:nvPicPr>
-          <p:cNvPr id="5" name="Loss with a range icon" descr="Loss with a range">    </p:cNvPr>
-          <p:cNvPicPr>
-            <a:picLocks noChangeAspect="1"/>
-          </p:cNvPicPr>
-          <p:nvPr/>
-        </p:nvPicPr>
-        <p:blipFill>
-          <a:blip r:embed="rId1"/>
-          <a:stretch>
-            <a:fillRect/>
-          </a:stretch>
-        </p:blipFill>
-        <p:spPr>
-          <a:xfrm>
-            <a:off x="857250" y="1680210"/>
-            <a:ext cx="251460" cy="251460"/>
-          </a:xfrm>
-          <a:prstGeom prst="rect">
-            <a:avLst/>
-          </a:prstGeom>
-        </p:spPr>
-      </p:pic>
-      <p:sp>
-        <p:nvSpPr>
-          <p:cNvPr id="6" name="Text 3"/>
-          <p:cNvSpPr txBox="1"/>
-          <p:nvPr/>
-        </p:nvSpPr>
-        <p:spPr>
-          <a:xfrm>
-            <a:off x="1371600" y="1572768"/>
-            <a:ext cx="1645920" cy="457200"/>
-          </a:xfrm>
-          <a:prstGeom prst="rect">
-            <a:avLst/>
-          </a:prstGeom>
-          <a:noFill/>
-          <a:ln/>
-        </p:spPr>
-        <p:txBody>
-          <a:bodyPr wrap="square" lIns="0" tIns="0" rIns="0" bIns="0" rtlCol="0" anchor="ctr"/>
-          <a:lstStyle/>
-          <a:p>
-            <a:pPr indent="0" marL="0">
-              <a:buNone/>
-            </a:pPr>
-            <a:r>
-              <a:rPr lang="en-US" sz="1600" b="1" dirty="0">
-                <a:solidFill>
-                  <a:schemeClr val="tx1"/>
-                </a:solidFill>
-              </a:rPr>
-              <a:t>Loss with a range</a:t>
-            </a:r>
-            <a:endParaRPr lang="en-US" sz="1600" dirty="0"/>
-          </a:p>
-        </p:txBody>
-      </p:sp>
-      <p:sp>
-        <p:nvSpPr>
-          <p:cNvPr id="7" name="Text 4"/>
-          <p:cNvSpPr txBox="1"/>
-          <p:nvPr/>
-        </p:nvSpPr>
-        <p:spPr>
-          <a:xfrm>
-            <a:off x="731520" y="2194560"/>
-            <a:ext cx="2240280" cy="548640"/>
-          </a:xfrm>
-          <a:prstGeom prst="rect">
-            <a:avLst/>
-          </a:prstGeom>
-          <a:noFill/>
-          <a:ln/>
-        </p:spPr>
-        <p:txBody>
-          <a:bodyPr wrap="square" lIns="0" tIns="0" rIns="0" bIns="0" rtlCol="0" anchor="t"/>
-          <a:lstStyle/>
-          <a:p>
-            <a:pPr indent="0" marL="0">
-              <a:buNone/>
-            </a:pPr>
-            <a:r>
-              <a:rPr lang="en-US" sz="1300" dirty="0">
-                <a:solidFill>
-                  <a:schemeClr val="tx2"/>
-                </a:solidFill>
-              </a:rPr>
-              <a:t>Vegetation loss with a 95% interval, not one number.</a:t>
-            </a:r>
-            <a:endParaRPr lang="en-US" sz="1300" dirty="0"/>
-          </a:p>
-        </p:txBody>
-      </p:sp>
-      <p:sp>
-        <p:nvSpPr>
-          <p:cNvPr id="8" name="Feature 2"/>
-          <p:cNvSpPr/>
-          <p:nvPr/>
-        </p:nvSpPr>
-        <p:spPr>
-          <a:xfrm>
-            <a:off x="3291840" y="1371600"/>
-            <a:ext cx="2560320" cy="1463040"/>
+            <a:off x="3291840" y="3200400"/>
+            <a:ext cx="2560320" cy="1188720"/>
           </a:xfrm>
           <a:prstGeom prst="roundRect">
             <a:avLst>
-              <a:gd name="adj" fmla="val 7500"/>
+              <a:gd name="adj" fmla="val 9231"/>
             </a:avLst>
           </a:prstGeom>
           <a:solidFill>
@@ -4349,139 +4407,90 @@
       </p:sp>
       <p:sp>
         <p:nvSpPr>
-          <p:cNvPr id="9" name="Damage-zone map badge"/>
+          <p:cNvPr id="18" name="Text 16"/>
+          <p:cNvSpPr txBox="1"/>
+          <p:nvPr/>
+        </p:nvSpPr>
+        <p:spPr>
+          <a:xfrm>
+            <a:off x="3474720" y="3310128"/>
+            <a:ext cx="2194560" cy="320040"/>
+          </a:xfrm>
+          <a:prstGeom prst="rect">
+            <a:avLst/>
+          </a:prstGeom>
+          <a:noFill/>
+          <a:ln/>
+        </p:spPr>
+        <p:txBody>
+          <a:bodyPr wrap="square" lIns="0" tIns="0" rIns="0" bIns="0" rtlCol="0" anchor="ctr"/>
+          <a:lstStyle/>
+          <a:p>
+            <a:pPr indent="0" marL="0">
+              <a:buNone/>
+            </a:pPr>
+            <a:r>
+              <a:rPr lang="en-US" sz="1600" b="1" dirty="0">
+                <a:solidFill>
+                  <a:schemeClr val="tx1"/>
+                </a:solidFill>
+              </a:rPr>
+              <a:t>Statistics</a:t>
+            </a:r>
+            <a:endParaRPr lang="en-US" sz="1600" dirty="0"/>
+          </a:p>
+        </p:txBody>
+      </p:sp>
+      <p:sp>
+        <p:nvSpPr>
+          <p:cNvPr id="19" name="Text 17"/>
+          <p:cNvSpPr txBox="1"/>
+          <p:nvPr/>
+        </p:nvSpPr>
+        <p:spPr>
+          <a:xfrm>
+            <a:off x="3474720" y="3675888"/>
+            <a:ext cx="2194560" cy="640080"/>
+          </a:xfrm>
+          <a:prstGeom prst="rect">
+            <a:avLst/>
+          </a:prstGeom>
+          <a:noFill/>
+          <a:ln/>
+        </p:spPr>
+        <p:txBody>
+          <a:bodyPr wrap="square" lIns="0" tIns="0" rIns="0" bIns="0" rtlCol="0" anchor="t"/>
+          <a:lstStyle/>
+          <a:p>
+            <a:pPr indent="0" marL="0">
+              <a:buNone/>
+            </a:pPr>
+            <a:r>
+              <a:rPr lang="en-US" sz="1300" dirty="0">
+                <a:solidFill>
+                  <a:schemeClr val="tx2"/>
+                </a:solidFill>
+              </a:rPr>
+              <a:t>Theil-Sen, bootstrap, change-point, k-means</a:t>
+            </a:r>
+            <a:endParaRPr lang="en-US" sz="1300" dirty="0"/>
+          </a:p>
+        </p:txBody>
+      </p:sp>
+      <p:sp>
+        <p:nvSpPr>
+          <p:cNvPr id="20" name="Support 3"/>
           <p:cNvSpPr/>
           <p:nvPr/>
         </p:nvSpPr>
         <p:spPr>
           <a:xfrm>
-            <a:off x="3474720" y="1554480"/>
-            <a:ext cx="502920" cy="502920"/>
-          </a:xfrm>
-          <a:prstGeom prst="ellipse">
-            <a:avLst/>
-          </a:prstGeom>
-          <a:solidFill>
-            <a:schemeClr val="tx1"/>
-          </a:solidFill>
-          <a:ln w="12700">
-            <a:solidFill>
-              <a:schemeClr val="tx1"/>
-            </a:solidFill>
-            <a:prstDash val="solid"/>
-          </a:ln>
-        </p:spPr>
-      </p:sp>
-      <p:pic>
-        <p:nvPicPr>
-          <p:cNvPr id="10" name="Damage-zone map icon" descr="Damage-zone map">    </p:cNvPr>
-          <p:cNvPicPr>
-            <a:picLocks noChangeAspect="1"/>
-          </p:cNvPicPr>
-          <p:nvPr/>
-        </p:nvPicPr>
-        <p:blipFill>
-          <a:blip r:embed="rId2"/>
-          <a:stretch>
-            <a:fillRect/>
-          </a:stretch>
-        </p:blipFill>
-        <p:spPr>
-          <a:xfrm>
-            <a:off x="3600450" y="1680210"/>
-            <a:ext cx="251460" cy="251460"/>
-          </a:xfrm>
-          <a:prstGeom prst="rect">
-            <a:avLst/>
-          </a:prstGeom>
-        </p:spPr>
-      </p:pic>
-      <p:sp>
-        <p:nvSpPr>
-          <p:cNvPr id="11" name="Text 7"/>
-          <p:cNvSpPr txBox="1"/>
-          <p:nvPr/>
-        </p:nvSpPr>
-        <p:spPr>
-          <a:xfrm>
-            <a:off x="4114800" y="1572768"/>
-            <a:ext cx="1645920" cy="457200"/>
-          </a:xfrm>
-          <a:prstGeom prst="rect">
-            <a:avLst/>
-          </a:prstGeom>
-          <a:noFill/>
-          <a:ln/>
-        </p:spPr>
-        <p:txBody>
-          <a:bodyPr wrap="square" lIns="0" tIns="0" rIns="0" bIns="0" rtlCol="0" anchor="ctr"/>
-          <a:lstStyle/>
-          <a:p>
-            <a:pPr indent="0" marL="0">
-              <a:buNone/>
-            </a:pPr>
-            <a:r>
-              <a:rPr lang="en-US" sz="1600" b="1" dirty="0">
-                <a:solidFill>
-                  <a:schemeClr val="tx1"/>
-                </a:solidFill>
-              </a:rPr>
-              <a:t>Damage-zone map</a:t>
-            </a:r>
-            <a:endParaRPr lang="en-US" sz="1600" dirty="0"/>
-          </a:p>
-        </p:txBody>
-      </p:sp>
-      <p:sp>
-        <p:nvSpPr>
-          <p:cNvPr id="12" name="Text 8"/>
-          <p:cNvSpPr txBox="1"/>
-          <p:nvPr/>
-        </p:nvSpPr>
-        <p:spPr>
-          <a:xfrm>
-            <a:off x="3474720" y="2194560"/>
-            <a:ext cx="2240280" cy="548640"/>
-          </a:xfrm>
-          <a:prstGeom prst="rect">
-            <a:avLst/>
-          </a:prstGeom>
-          <a:noFill/>
-          <a:ln/>
-        </p:spPr>
-        <p:txBody>
-          <a:bodyPr wrap="square" lIns="0" tIns="0" rIns="0" bIns="0" rtlCol="0" anchor="t"/>
-          <a:lstStyle/>
-          <a:p>
-            <a:pPr indent="0" marL="0">
-              <a:buNone/>
-            </a:pPr>
-            <a:r>
-              <a:rPr lang="en-US" sz="1300" dirty="0">
-                <a:solidFill>
-                  <a:schemeClr val="tx2"/>
-                </a:solidFill>
-              </a:rPr>
-              <a:t>Severe, moderate and stable zones on the field.</a:t>
-            </a:r>
-            <a:endParaRPr lang="en-US" sz="1300" dirty="0"/>
-          </a:p>
-        </p:txBody>
-      </p:sp>
-      <p:sp>
-        <p:nvSpPr>
-          <p:cNvPr id="13" name="Feature 3"/>
-          <p:cNvSpPr/>
-          <p:nvPr/>
-        </p:nvSpPr>
-        <p:spPr>
-          <a:xfrm>
-            <a:off x="6035040" y="1371600"/>
-            <a:ext cx="2560320" cy="1463040"/>
+            <a:off x="6035040" y="3200400"/>
+            <a:ext cx="2560320" cy="1188720"/>
           </a:xfrm>
           <a:prstGeom prst="roundRect">
             <a:avLst>
-              <a:gd name="adj" fmla="val 7500"/>
+              <a:gd name="adj" fmla="val 9231"/>
             </a:avLst>
           </a:prstGeom>
           <a:solidFill>
@@ -4497,63 +4506,14 @@
       </p:sp>
       <p:sp>
         <p:nvSpPr>
-          <p:cNvPr id="14" name="Weather check badge"/>
-          <p:cNvSpPr/>
-          <p:nvPr/>
-        </p:nvSpPr>
-        <p:spPr>
-          <a:xfrm>
-            <a:off x="6217920" y="1554480"/>
-            <a:ext cx="502920" cy="502920"/>
-          </a:xfrm>
-          <a:prstGeom prst="ellipse">
-            <a:avLst/>
-          </a:prstGeom>
-          <a:solidFill>
-            <a:schemeClr val="tx1"/>
-          </a:solidFill>
-          <a:ln w="12700">
-            <a:solidFill>
-              <a:schemeClr val="tx1"/>
-            </a:solidFill>
-            <a:prstDash val="solid"/>
-          </a:ln>
-        </p:spPr>
-      </p:sp>
-      <p:pic>
-        <p:nvPicPr>
-          <p:cNvPr id="15" name="Weather check icon" descr="Weather check">    </p:cNvPr>
-          <p:cNvPicPr>
-            <a:picLocks noChangeAspect="1"/>
-          </p:cNvPicPr>
-          <p:nvPr/>
-        </p:nvPicPr>
-        <p:blipFill>
-          <a:blip r:embed="rId3"/>
-          <a:stretch>
-            <a:fillRect/>
-          </a:stretch>
-        </p:blipFill>
-        <p:spPr>
-          <a:xfrm>
-            <a:off x="6343650" y="1680210"/>
-            <a:ext cx="251460" cy="251460"/>
-          </a:xfrm>
-          <a:prstGeom prst="rect">
-            <a:avLst/>
-          </a:prstGeom>
-        </p:spPr>
-      </p:pic>
-      <p:sp>
-        <p:nvSpPr>
-          <p:cNvPr id="16" name="Text 11"/>
+          <p:cNvPr id="21" name="Text 19"/>
           <p:cNvSpPr txBox="1"/>
           <p:nvPr/>
         </p:nvSpPr>
         <p:spPr>
           <a:xfrm>
-            <a:off x="6858000" y="1572768"/>
-            <a:ext cx="1645920" cy="457200"/>
+            <a:off x="6217920" y="3310128"/>
+            <a:ext cx="2194560" cy="320040"/>
           </a:xfrm>
           <a:prstGeom prst="rect">
             <a:avLst/>
@@ -4574,7 +4534,7 @@
                   <a:schemeClr val="tx1"/>
                 </a:solidFill>
               </a:rPr>
-              <a:t>Weather check</a:t>
+              <a:t>Hosting</a:t>
             </a:r>
             <a:endParaRPr lang="en-US" sz="1600" dirty="0"/>
           </a:p>
@@ -4582,14 +4542,14 @@
       </p:sp>
       <p:sp>
         <p:nvSpPr>
-          <p:cNvPr id="17" name="Text 12"/>
+          <p:cNvPr id="22" name="Text 20"/>
           <p:cNvSpPr txBox="1"/>
           <p:nvPr/>
         </p:nvSpPr>
         <p:spPr>
           <a:xfrm>
-            <a:off x="6217920" y="2194560"/>
-            <a:ext cx="2240280" cy="548640"/>
+            <a:off x="6217920" y="3675888"/>
+            <a:ext cx="2194560" cy="640080"/>
           </a:xfrm>
           <a:prstGeom prst="rect">
             <a:avLst/>
@@ -4610,451 +4570,7 @@
                   <a:schemeClr val="tx2"/>
                 </a:solidFill>
               </a:rPr>
-              <a:t>Rain ranked against that place's own 10 years.</a:t>
-            </a:r>
-            <a:endParaRPr lang="en-US" sz="1300" dirty="0"/>
-          </a:p>
-        </p:txBody>
-      </p:sp>
-      <p:sp>
-        <p:nvSpPr>
-          <p:cNvPr id="18" name="Feature 4"/>
-          <p:cNvSpPr/>
-          <p:nvPr/>
-        </p:nvSpPr>
-        <p:spPr>
-          <a:xfrm>
-            <a:off x="548640" y="3017520"/>
-            <a:ext cx="2560320" cy="1463040"/>
-          </a:xfrm>
-          <a:prstGeom prst="roundRect">
-            <a:avLst>
-              <a:gd name="adj" fmla="val 7500"/>
-            </a:avLst>
-          </a:prstGeom>
-          <a:solidFill>
-            <a:schemeClr val="bg2"/>
-          </a:solidFill>
-          <a:ln w="12700">
-            <a:solidFill>
-              <a:schemeClr val="bg2"/>
-            </a:solidFill>
-            <a:prstDash val="solid"/>
-          </a:ln>
-        </p:spPr>
-      </p:sp>
-      <p:sp>
-        <p:nvSpPr>
-          <p:cNvPr id="19" name="Crop-aware badge"/>
-          <p:cNvSpPr/>
-          <p:nvPr/>
-        </p:nvSpPr>
-        <p:spPr>
-          <a:xfrm>
-            <a:off x="731520" y="3200400"/>
-            <a:ext cx="502920" cy="502920"/>
-          </a:xfrm>
-          <a:prstGeom prst="ellipse">
-            <a:avLst/>
-          </a:prstGeom>
-          <a:solidFill>
-            <a:schemeClr val="tx1"/>
-          </a:solidFill>
-          <a:ln w="12700">
-            <a:solidFill>
-              <a:schemeClr val="tx1"/>
-            </a:solidFill>
-            <a:prstDash val="solid"/>
-          </a:ln>
-        </p:spPr>
-      </p:sp>
-      <p:pic>
-        <p:nvPicPr>
-          <p:cNvPr id="20" name="Crop-aware icon" descr="Crop-aware">    </p:cNvPr>
-          <p:cNvPicPr>
-            <a:picLocks noChangeAspect="1"/>
-          </p:cNvPicPr>
-          <p:nvPr/>
-        </p:nvPicPr>
-        <p:blipFill>
-          <a:blip r:embed="rId4"/>
-          <a:stretch>
-            <a:fillRect/>
-          </a:stretch>
-        </p:blipFill>
-        <p:spPr>
-          <a:xfrm>
-            <a:off x="857250" y="3326130"/>
-            <a:ext cx="251460" cy="251460"/>
-          </a:xfrm>
-          <a:prstGeom prst="rect">
-            <a:avLst/>
-          </a:prstGeom>
-        </p:spPr>
-      </p:pic>
-      <p:sp>
-        <p:nvSpPr>
-          <p:cNvPr id="21" name="Text 15"/>
-          <p:cNvSpPr txBox="1"/>
-          <p:nvPr/>
-        </p:nvSpPr>
-        <p:spPr>
-          <a:xfrm>
-            <a:off x="1371600" y="3218688"/>
-            <a:ext cx="1645920" cy="457200"/>
-          </a:xfrm>
-          <a:prstGeom prst="rect">
-            <a:avLst/>
-          </a:prstGeom>
-          <a:noFill/>
-          <a:ln/>
-        </p:spPr>
-        <p:txBody>
-          <a:bodyPr wrap="square" lIns="0" tIns="0" rIns="0" bIns="0" rtlCol="0" anchor="ctr"/>
-          <a:lstStyle/>
-          <a:p>
-            <a:pPr indent="0" marL="0">
-              <a:buNone/>
-            </a:pPr>
-            <a:r>
-              <a:rPr lang="en-US" sz="1600" b="1" dirty="0">
-                <a:solidFill>
-                  <a:schemeClr val="tx1"/>
-                </a:solidFill>
-              </a:rPr>
-              <a:t>Crop-aware</a:t>
-            </a:r>
-            <a:endParaRPr lang="en-US" sz="1600" dirty="0"/>
-          </a:p>
-        </p:txBody>
-      </p:sp>
-      <p:sp>
-        <p:nvSpPr>
-          <p:cNvPr id="22" name="Text 16"/>
-          <p:cNvSpPr txBox="1"/>
-          <p:nvPr/>
-        </p:nvSpPr>
-        <p:spPr>
-          <a:xfrm>
-            <a:off x="731520" y="3840480"/>
-            <a:ext cx="2240280" cy="548640"/>
-          </a:xfrm>
-          <a:prstGeom prst="rect">
-            <a:avLst/>
-          </a:prstGeom>
-          <a:noFill/>
-          <a:ln/>
-        </p:spPr>
-        <p:txBody>
-          <a:bodyPr wrap="square" lIns="0" tIns="0" rIns="0" bIns="0" rtlCol="0" anchor="t"/>
-          <a:lstStyle/>
-          <a:p>
-            <a:pPr indent="0" marL="0">
-              <a:buNone/>
-            </a:pPr>
-            <a:r>
-              <a:rPr lang="en-US" sz="1300" dirty="0">
-                <a:solidFill>
-                  <a:schemeClr val="tx2"/>
-                </a:solidFill>
-              </a:rPr>
-              <a:t>20 crops, growth stage and ripening guard.</a:t>
-            </a:r>
-            <a:endParaRPr lang="en-US" sz="1300" dirty="0"/>
-          </a:p>
-        </p:txBody>
-      </p:sp>
-      <p:sp>
-        <p:nvSpPr>
-          <p:cNvPr id="23" name="Feature 5"/>
-          <p:cNvSpPr/>
-          <p:nvPr/>
-        </p:nvSpPr>
-        <p:spPr>
-          <a:xfrm>
-            <a:off x="3291840" y="3017520"/>
-            <a:ext cx="2560320" cy="1463040"/>
-          </a:xfrm>
-          <a:prstGeom prst="roundRect">
-            <a:avLst>
-              <a:gd name="adj" fmla="val 7500"/>
-            </a:avLst>
-          </a:prstGeom>
-          <a:solidFill>
-            <a:schemeClr val="bg2"/>
-          </a:solidFill>
-          <a:ln w="12700">
-            <a:solidFill>
-              <a:schemeClr val="bg2"/>
-            </a:solidFill>
-            <a:prstDash val="solid"/>
-          </a:ln>
-        </p:spPr>
-      </p:sp>
-      <p:sp>
-        <p:nvSpPr>
-          <p:cNvPr id="24" name="Signed report badge"/>
-          <p:cNvSpPr/>
-          <p:nvPr/>
-        </p:nvSpPr>
-        <p:spPr>
-          <a:xfrm>
-            <a:off x="3474720" y="3200400"/>
-            <a:ext cx="502920" cy="502920"/>
-          </a:xfrm>
-          <a:prstGeom prst="ellipse">
-            <a:avLst/>
-          </a:prstGeom>
-          <a:solidFill>
-            <a:schemeClr val="tx1"/>
-          </a:solidFill>
-          <a:ln w="12700">
-            <a:solidFill>
-              <a:schemeClr val="tx1"/>
-            </a:solidFill>
-            <a:prstDash val="solid"/>
-          </a:ln>
-        </p:spPr>
-      </p:sp>
-      <p:pic>
-        <p:nvPicPr>
-          <p:cNvPr id="25" name="Signed report icon" descr="Signed report">    </p:cNvPr>
-          <p:cNvPicPr>
-            <a:picLocks noChangeAspect="1"/>
-          </p:cNvPicPr>
-          <p:nvPr/>
-        </p:nvPicPr>
-        <p:blipFill>
-          <a:blip r:embed="rId5"/>
-          <a:stretch>
-            <a:fillRect/>
-          </a:stretch>
-        </p:blipFill>
-        <p:spPr>
-          <a:xfrm>
-            <a:off x="3600450" y="3326130"/>
-            <a:ext cx="251460" cy="251460"/>
-          </a:xfrm>
-          <a:prstGeom prst="rect">
-            <a:avLst/>
-          </a:prstGeom>
-        </p:spPr>
-      </p:pic>
-      <p:sp>
-        <p:nvSpPr>
-          <p:cNvPr id="26" name="Text 19"/>
-          <p:cNvSpPr txBox="1"/>
-          <p:nvPr/>
-        </p:nvSpPr>
-        <p:spPr>
-          <a:xfrm>
-            <a:off x="4114800" y="3218688"/>
-            <a:ext cx="1645920" cy="457200"/>
-          </a:xfrm>
-          <a:prstGeom prst="rect">
-            <a:avLst/>
-          </a:prstGeom>
-          <a:noFill/>
-          <a:ln/>
-        </p:spPr>
-        <p:txBody>
-          <a:bodyPr wrap="square" lIns="0" tIns="0" rIns="0" bIns="0" rtlCol="0" anchor="ctr"/>
-          <a:lstStyle/>
-          <a:p>
-            <a:pPr indent="0" marL="0">
-              <a:buNone/>
-            </a:pPr>
-            <a:r>
-              <a:rPr lang="en-US" sz="1600" b="1" dirty="0">
-                <a:solidFill>
-                  <a:schemeClr val="tx1"/>
-                </a:solidFill>
-              </a:rPr>
-              <a:t>Signed report</a:t>
-            </a:r>
-            <a:endParaRPr lang="en-US" sz="1600" dirty="0"/>
-          </a:p>
-        </p:txBody>
-      </p:sp>
-      <p:sp>
-        <p:nvSpPr>
-          <p:cNvPr id="27" name="Text 20"/>
-          <p:cNvSpPr txBox="1"/>
-          <p:nvPr/>
-        </p:nvSpPr>
-        <p:spPr>
-          <a:xfrm>
-            <a:off x="3474720" y="3840480"/>
-            <a:ext cx="2240280" cy="548640"/>
-          </a:xfrm>
-          <a:prstGeom prst="rect">
-            <a:avLst/>
-          </a:prstGeom>
-          <a:noFill/>
-          <a:ln/>
-        </p:spPr>
-        <p:txBody>
-          <a:bodyPr wrap="square" lIns="0" tIns="0" rIns="0" bIns="0" rtlCol="0" anchor="t"/>
-          <a:lstStyle/>
-          <a:p>
-            <a:pPr indent="0" marL="0">
-              <a:buNone/>
-            </a:pPr>
-            <a:r>
-              <a:rPr lang="en-US" sz="1300" dirty="0">
-                <a:solidFill>
-                  <a:schemeClr val="tx2"/>
-                </a:solidFill>
-              </a:rPr>
-              <a:t>Anyone can verify it has not been edited.</a:t>
-            </a:r>
-            <a:endParaRPr lang="en-US" sz="1300" dirty="0"/>
-          </a:p>
-        </p:txBody>
-      </p:sp>
-      <p:sp>
-        <p:nvSpPr>
-          <p:cNvPr id="28" name="Feature 6"/>
-          <p:cNvSpPr/>
-          <p:nvPr/>
-        </p:nvSpPr>
-        <p:spPr>
-          <a:xfrm>
-            <a:off x="6035040" y="3017520"/>
-            <a:ext cx="2560320" cy="1463040"/>
-          </a:xfrm>
-          <a:prstGeom prst="roundRect">
-            <a:avLst>
-              <a:gd name="adj" fmla="val 7500"/>
-            </a:avLst>
-          </a:prstGeom>
-          <a:solidFill>
-            <a:schemeClr val="bg2"/>
-          </a:solidFill>
-          <a:ln w="12700">
-            <a:solidFill>
-              <a:schemeClr val="bg2"/>
-            </a:solidFill>
-            <a:prstDash val="solid"/>
-          </a:ln>
-        </p:spPr>
-      </p:sp>
-      <p:sp>
-        <p:nvSpPr>
-          <p:cNvPr id="29" name="Six languages badge"/>
-          <p:cNvSpPr/>
-          <p:nvPr/>
-        </p:nvSpPr>
-        <p:spPr>
-          <a:xfrm>
-            <a:off x="6217920" y="3200400"/>
-            <a:ext cx="502920" cy="502920"/>
-          </a:xfrm>
-          <a:prstGeom prst="ellipse">
-            <a:avLst/>
-          </a:prstGeom>
-          <a:solidFill>
-            <a:schemeClr val="tx1"/>
-          </a:solidFill>
-          <a:ln w="12700">
-            <a:solidFill>
-              <a:schemeClr val="tx1"/>
-            </a:solidFill>
-            <a:prstDash val="solid"/>
-          </a:ln>
-        </p:spPr>
-      </p:sp>
-      <p:pic>
-        <p:nvPicPr>
-          <p:cNvPr id="30" name="Six languages icon" descr="Six languages">    </p:cNvPr>
-          <p:cNvPicPr>
-            <a:picLocks noChangeAspect="1"/>
-          </p:cNvPicPr>
-          <p:nvPr/>
-        </p:nvPicPr>
-        <p:blipFill>
-          <a:blip r:embed="rId6"/>
-          <a:stretch>
-            <a:fillRect/>
-          </a:stretch>
-        </p:blipFill>
-        <p:spPr>
-          <a:xfrm>
-            <a:off x="6343650" y="3326130"/>
-            <a:ext cx="251460" cy="251460"/>
-          </a:xfrm>
-          <a:prstGeom prst="rect">
-            <a:avLst/>
-          </a:prstGeom>
-        </p:spPr>
-      </p:pic>
-      <p:sp>
-        <p:nvSpPr>
-          <p:cNvPr id="31" name="Text 23"/>
-          <p:cNvSpPr txBox="1"/>
-          <p:nvPr/>
-        </p:nvSpPr>
-        <p:spPr>
-          <a:xfrm>
-            <a:off x="6858000" y="3218688"/>
-            <a:ext cx="1645920" cy="457200"/>
-          </a:xfrm>
-          <a:prstGeom prst="rect">
-            <a:avLst/>
-          </a:prstGeom>
-          <a:noFill/>
-          <a:ln/>
-        </p:spPr>
-        <p:txBody>
-          <a:bodyPr wrap="square" lIns="0" tIns="0" rIns="0" bIns="0" rtlCol="0" anchor="ctr"/>
-          <a:lstStyle/>
-          <a:p>
-            <a:pPr indent="0" marL="0">
-              <a:buNone/>
-            </a:pPr>
-            <a:r>
-              <a:rPr lang="en-US" sz="1600" b="1" dirty="0">
-                <a:solidFill>
-                  <a:schemeClr val="tx1"/>
-                </a:solidFill>
-              </a:rPr>
-              <a:t>Six languages</a:t>
-            </a:r>
-            <a:endParaRPr lang="en-US" sz="1600" dirty="0"/>
-          </a:p>
-        </p:txBody>
-      </p:sp>
-      <p:sp>
-        <p:nvSpPr>
-          <p:cNvPr id="32" name="Text 24"/>
-          <p:cNvSpPr txBox="1"/>
-          <p:nvPr/>
-        </p:nvSpPr>
-        <p:spPr>
-          <a:xfrm>
-            <a:off x="6217920" y="3840480"/>
-            <a:ext cx="2240280" cy="548640"/>
-          </a:xfrm>
-          <a:prstGeom prst="rect">
-            <a:avLst/>
-          </a:prstGeom>
-          <a:noFill/>
-          <a:ln/>
-        </p:spPr>
-        <p:txBody>
-          <a:bodyPr wrap="square" lIns="0" tIns="0" rIns="0" bIns="0" rtlCol="0" anchor="t"/>
-          <a:lstStyle/>
-          <a:p>
-            <a:pPr indent="0" marL="0">
-              <a:buNone/>
-            </a:pPr>
-            <a:r>
-              <a:rPr lang="en-US" sz="1300" dirty="0">
-                <a:solidFill>
-                  <a:schemeClr val="tx2"/>
-                </a:solidFill>
-              </a:rPr>
-              <a:t>Assistant, letter and report, worldwide.</a:t>
+              <a:t>GitHub Pages and Render, CI with pytest and Node tests</a:t>
             </a:r>
             <a:endParaRPr lang="en-US" sz="1300" dirty="0"/>
           </a:p>
@@ -5162,7 +4678,7 @@
                   <a:schemeClr val="tx1"/>
                 </a:solidFill>
               </a:rPr>
-              <a:t>More than a dashboard</a:t>
+              <a:t>What the farmer gets</a:t>
             </a:r>
             <a:endParaRPr lang="en-US" sz="3600" dirty="0"/>
           </a:p>
@@ -5170,18 +4686,18 @@
       </p:sp>
       <p:sp>
         <p:nvSpPr>
-          <p:cNvPr id="3" name="Dashboard card"/>
+          <p:cNvPr id="3" name="Feature 1"/>
           <p:cNvSpPr/>
           <p:nvPr/>
         </p:nvSpPr>
         <p:spPr>
           <a:xfrm>
             <a:off x="548640" y="1371600"/>
-            <a:ext cx="3931920" cy="3108960"/>
+            <a:ext cx="2560320" cy="1463040"/>
           </a:xfrm>
           <a:prstGeom prst="roundRect">
             <a:avLst>
-              <a:gd name="adj" fmla="val 3529"/>
+              <a:gd name="adj" fmla="val 7500"/>
             </a:avLst>
           </a:prstGeom>
           <a:solidFill>
@@ -5197,19 +4713,17 @@
       </p:sp>
       <p:sp>
         <p:nvSpPr>
-          <p:cNvPr id="4" name="FasalProof card"/>
+          <p:cNvPr id="4" name="Loss with a range badge"/>
           <p:cNvSpPr/>
           <p:nvPr/>
         </p:nvSpPr>
         <p:spPr>
           <a:xfrm>
-            <a:off x="4663440" y="1371600"/>
-            <a:ext cx="3931920" cy="3108960"/>
-          </a:xfrm>
-          <a:prstGeom prst="roundRect">
-            <a:avLst>
-              <a:gd name="adj" fmla="val 3529"/>
-            </a:avLst>
+            <a:off x="731520" y="1554480"/>
+            <a:ext cx="502920" cy="502920"/>
+          </a:xfrm>
+          <a:prstGeom prst="ellipse">
+            <a:avLst/>
           </a:prstGeom>
           <a:solidFill>
             <a:schemeClr val="tx1"/>
@@ -5222,16 +4736,40 @@
           </a:ln>
         </p:spPr>
       </p:sp>
-      <p:sp>
-        <p:nvSpPr>
-          <p:cNvPr id="5" name="Text 3"/>
+      <p:pic>
+        <p:nvPicPr>
+          <p:cNvPr id="5" name="Loss with a range icon" descr="Loss with a range">    </p:cNvPr>
+          <p:cNvPicPr>
+            <a:picLocks noChangeAspect="1"/>
+          </p:cNvPicPr>
+          <p:nvPr/>
+        </p:nvPicPr>
+        <p:blipFill>
+          <a:blip r:embed="rId1"/>
+          <a:stretch>
+            <a:fillRect/>
+          </a:stretch>
+        </p:blipFill>
+        <p:spPr>
+          <a:xfrm>
+            <a:off x="857250" y="1680210"/>
+            <a:ext cx="251460" cy="251460"/>
+          </a:xfrm>
+          <a:prstGeom prst="rect">
+            <a:avLst/>
+          </a:prstGeom>
+        </p:spPr>
+      </p:pic>
+      <p:sp>
+        <p:nvSpPr>
+          <p:cNvPr id="6" name="Text 3"/>
           <p:cNvSpPr txBox="1"/>
           <p:nvPr/>
         </p:nvSpPr>
         <p:spPr>
           <a:xfrm>
-            <a:off x="777240" y="1554480"/>
-            <a:ext cx="3474720" cy="365760"/>
+            <a:off x="1371600" y="1572768"/>
+            <a:ext cx="1645920" cy="457200"/>
           </a:xfrm>
           <a:prstGeom prst="rect">
             <a:avLst/>
@@ -5247,27 +4785,27 @@
               <a:buNone/>
             </a:pPr>
             <a:r>
-              <a:rPr lang="en-US" sz="2000" b="1" dirty="0">
+              <a:rPr lang="en-US" sz="1600" b="1" dirty="0">
                 <a:solidFill>
                   <a:schemeClr val="tx1"/>
                 </a:solidFill>
               </a:rPr>
-              <a:t>A conventional dashboard</a:t>
-            </a:r>
-            <a:endParaRPr lang="en-US" sz="2000" dirty="0"/>
-          </a:p>
-        </p:txBody>
-      </p:sp>
-      <p:sp>
-        <p:nvSpPr>
-          <p:cNvPr id="6" name="Text 4"/>
+              <a:t>Loss with a range</a:t>
+            </a:r>
+            <a:endParaRPr lang="en-US" sz="1600" dirty="0"/>
+          </a:p>
+        </p:txBody>
+      </p:sp>
+      <p:sp>
+        <p:nvSpPr>
+          <p:cNvPr id="7" name="Text 4"/>
           <p:cNvSpPr txBox="1"/>
           <p:nvPr/>
         </p:nvSpPr>
         <p:spPr>
           <a:xfrm>
-            <a:off x="777240" y="2057400"/>
-            <a:ext cx="3474720" cy="2286000"/>
+            <a:off x="731520" y="2194560"/>
+            <a:ext cx="2240280" cy="548640"/>
           </a:xfrm>
           <a:prstGeom prst="rect">
             <a:avLst/>
@@ -5279,89 +4817,551 @@
           <a:bodyPr wrap="square" lIns="0" tIns="0" rIns="0" bIns="0" rtlCol="0" anchor="t"/>
           <a:lstStyle/>
           <a:p>
-            <a:pPr marL="342900" indent="-342900">
-              <a:spcAft>
-                <a:spcPts val="800"/>
-              </a:spcAft>
-              <a:buSzPct val="100000"/>
-              <a:buChar char="•"/>
-            </a:pPr>
-            <a:r>
-              <a:rPr lang="en-US" sz="1400" dirty="0">
+            <a:pPr indent="0" marL="0">
+              <a:buNone/>
+            </a:pPr>
+            <a:r>
+              <a:rPr lang="en-US" sz="1300" dirty="0">
                 <a:solidFill>
                   <a:schemeClr val="tx2"/>
                 </a:solidFill>
               </a:rPr>
-              <a:t>Aggregates by district or region</a:t>
-            </a:r>
-            <a:endParaRPr lang="en-US" sz="1400" dirty="0"/>
-          </a:p>
-          <a:p>
-            <a:pPr marL="342900" indent="-342900">
-              <a:spcAft>
-                <a:spcPts val="800"/>
-              </a:spcAft>
-              <a:buSzPct val="100000"/>
-              <a:buChar char="•"/>
-            </a:pPr>
-            <a:r>
-              <a:rPr lang="en-US" sz="1400" dirty="0">
+              <a:t>Vegetation loss with a 95% interval, not one number.</a:t>
+            </a:r>
+            <a:endParaRPr lang="en-US" sz="1300" dirty="0"/>
+          </a:p>
+        </p:txBody>
+      </p:sp>
+      <p:sp>
+        <p:nvSpPr>
+          <p:cNvPr id="8" name="Feature 2"/>
+          <p:cNvSpPr/>
+          <p:nvPr/>
+        </p:nvSpPr>
+        <p:spPr>
+          <a:xfrm>
+            <a:off x="3291840" y="1371600"/>
+            <a:ext cx="2560320" cy="1463040"/>
+          </a:xfrm>
+          <a:prstGeom prst="roundRect">
+            <a:avLst>
+              <a:gd name="adj" fmla="val 7500"/>
+            </a:avLst>
+          </a:prstGeom>
+          <a:solidFill>
+            <a:schemeClr val="bg2"/>
+          </a:solidFill>
+          <a:ln w="12700">
+            <a:solidFill>
+              <a:schemeClr val="bg2"/>
+            </a:solidFill>
+            <a:prstDash val="solid"/>
+          </a:ln>
+        </p:spPr>
+      </p:sp>
+      <p:sp>
+        <p:nvSpPr>
+          <p:cNvPr id="9" name="Damage-zone map badge"/>
+          <p:cNvSpPr/>
+          <p:nvPr/>
+        </p:nvSpPr>
+        <p:spPr>
+          <a:xfrm>
+            <a:off x="3474720" y="1554480"/>
+            <a:ext cx="502920" cy="502920"/>
+          </a:xfrm>
+          <a:prstGeom prst="ellipse">
+            <a:avLst/>
+          </a:prstGeom>
+          <a:solidFill>
+            <a:schemeClr val="tx1"/>
+          </a:solidFill>
+          <a:ln w="12700">
+            <a:solidFill>
+              <a:schemeClr val="tx1"/>
+            </a:solidFill>
+            <a:prstDash val="solid"/>
+          </a:ln>
+        </p:spPr>
+      </p:sp>
+      <p:pic>
+        <p:nvPicPr>
+          <p:cNvPr id="10" name="Damage-zone map icon" descr="Damage-zone map">    </p:cNvPr>
+          <p:cNvPicPr>
+            <a:picLocks noChangeAspect="1"/>
+          </p:cNvPicPr>
+          <p:nvPr/>
+        </p:nvPicPr>
+        <p:blipFill>
+          <a:blip r:embed="rId2"/>
+          <a:stretch>
+            <a:fillRect/>
+          </a:stretch>
+        </p:blipFill>
+        <p:spPr>
+          <a:xfrm>
+            <a:off x="3600450" y="1680210"/>
+            <a:ext cx="251460" cy="251460"/>
+          </a:xfrm>
+          <a:prstGeom prst="rect">
+            <a:avLst/>
+          </a:prstGeom>
+        </p:spPr>
+      </p:pic>
+      <p:sp>
+        <p:nvSpPr>
+          <p:cNvPr id="11" name="Text 7"/>
+          <p:cNvSpPr txBox="1"/>
+          <p:nvPr/>
+        </p:nvSpPr>
+        <p:spPr>
+          <a:xfrm>
+            <a:off x="4114800" y="1572768"/>
+            <a:ext cx="1645920" cy="457200"/>
+          </a:xfrm>
+          <a:prstGeom prst="rect">
+            <a:avLst/>
+          </a:prstGeom>
+          <a:noFill/>
+          <a:ln/>
+        </p:spPr>
+        <p:txBody>
+          <a:bodyPr wrap="square" lIns="0" tIns="0" rIns="0" bIns="0" rtlCol="0" anchor="ctr"/>
+          <a:lstStyle/>
+          <a:p>
+            <a:pPr indent="0" marL="0">
+              <a:buNone/>
+            </a:pPr>
+            <a:r>
+              <a:rPr lang="en-US" sz="1600" b="1" dirty="0">
+                <a:solidFill>
+                  <a:schemeClr val="tx1"/>
+                </a:solidFill>
+              </a:rPr>
+              <a:t>Damage-zone map</a:t>
+            </a:r>
+            <a:endParaRPr lang="en-US" sz="1600" dirty="0"/>
+          </a:p>
+        </p:txBody>
+      </p:sp>
+      <p:sp>
+        <p:nvSpPr>
+          <p:cNvPr id="12" name="Text 8"/>
+          <p:cNvSpPr txBox="1"/>
+          <p:nvPr/>
+        </p:nvSpPr>
+        <p:spPr>
+          <a:xfrm>
+            <a:off x="3474720" y="2194560"/>
+            <a:ext cx="2240280" cy="548640"/>
+          </a:xfrm>
+          <a:prstGeom prst="rect">
+            <a:avLst/>
+          </a:prstGeom>
+          <a:noFill/>
+          <a:ln/>
+        </p:spPr>
+        <p:txBody>
+          <a:bodyPr wrap="square" lIns="0" tIns="0" rIns="0" bIns="0" rtlCol="0" anchor="t"/>
+          <a:lstStyle/>
+          <a:p>
+            <a:pPr indent="0" marL="0">
+              <a:buNone/>
+            </a:pPr>
+            <a:r>
+              <a:rPr lang="en-US" sz="1300" dirty="0">
                 <a:solidFill>
                   <a:schemeClr val="tx2"/>
                 </a:solidFill>
               </a:rPr>
-              <a:t>Asks: how is the season going?</a:t>
-            </a:r>
-            <a:endParaRPr lang="en-US" sz="1400" dirty="0"/>
-          </a:p>
-          <a:p>
-            <a:pPr marL="342900" indent="-342900">
-              <a:spcAft>
-                <a:spcPts val="800"/>
-              </a:spcAft>
-              <a:buSzPct val="100000"/>
-              <a:buChar char="•"/>
-            </a:pPr>
-            <a:r>
-              <a:rPr lang="en-US" sz="1400" dirty="0">
+              <a:t>Severe, moderate and stable zones on the field.</a:t>
+            </a:r>
+            <a:endParaRPr lang="en-US" sz="1300" dirty="0"/>
+          </a:p>
+        </p:txBody>
+      </p:sp>
+      <p:sp>
+        <p:nvSpPr>
+          <p:cNvPr id="13" name="Feature 3"/>
+          <p:cNvSpPr/>
+          <p:nvPr/>
+        </p:nvSpPr>
+        <p:spPr>
+          <a:xfrm>
+            <a:off x="6035040" y="1371600"/>
+            <a:ext cx="2560320" cy="1463040"/>
+          </a:xfrm>
+          <a:prstGeom prst="roundRect">
+            <a:avLst>
+              <a:gd name="adj" fmla="val 7500"/>
+            </a:avLst>
+          </a:prstGeom>
+          <a:solidFill>
+            <a:schemeClr val="bg2"/>
+          </a:solidFill>
+          <a:ln w="12700">
+            <a:solidFill>
+              <a:schemeClr val="bg2"/>
+            </a:solidFill>
+            <a:prstDash val="solid"/>
+          </a:ln>
+        </p:spPr>
+      </p:sp>
+      <p:sp>
+        <p:nvSpPr>
+          <p:cNvPr id="14" name="Weather check badge"/>
+          <p:cNvSpPr/>
+          <p:nvPr/>
+        </p:nvSpPr>
+        <p:spPr>
+          <a:xfrm>
+            <a:off x="6217920" y="1554480"/>
+            <a:ext cx="502920" cy="502920"/>
+          </a:xfrm>
+          <a:prstGeom prst="ellipse">
+            <a:avLst/>
+          </a:prstGeom>
+          <a:solidFill>
+            <a:schemeClr val="tx1"/>
+          </a:solidFill>
+          <a:ln w="12700">
+            <a:solidFill>
+              <a:schemeClr val="tx1"/>
+            </a:solidFill>
+            <a:prstDash val="solid"/>
+          </a:ln>
+        </p:spPr>
+      </p:sp>
+      <p:pic>
+        <p:nvPicPr>
+          <p:cNvPr id="15" name="Weather check icon" descr="Weather check">    </p:cNvPr>
+          <p:cNvPicPr>
+            <a:picLocks noChangeAspect="1"/>
+          </p:cNvPicPr>
+          <p:nvPr/>
+        </p:nvPicPr>
+        <p:blipFill>
+          <a:blip r:embed="rId3"/>
+          <a:stretch>
+            <a:fillRect/>
+          </a:stretch>
+        </p:blipFill>
+        <p:spPr>
+          <a:xfrm>
+            <a:off x="6343650" y="1680210"/>
+            <a:ext cx="251460" cy="251460"/>
+          </a:xfrm>
+          <a:prstGeom prst="rect">
+            <a:avLst/>
+          </a:prstGeom>
+        </p:spPr>
+      </p:pic>
+      <p:sp>
+        <p:nvSpPr>
+          <p:cNvPr id="16" name="Text 11"/>
+          <p:cNvSpPr txBox="1"/>
+          <p:nvPr/>
+        </p:nvSpPr>
+        <p:spPr>
+          <a:xfrm>
+            <a:off x="6858000" y="1572768"/>
+            <a:ext cx="1645920" cy="457200"/>
+          </a:xfrm>
+          <a:prstGeom prst="rect">
+            <a:avLst/>
+          </a:prstGeom>
+          <a:noFill/>
+          <a:ln/>
+        </p:spPr>
+        <p:txBody>
+          <a:bodyPr wrap="square" lIns="0" tIns="0" rIns="0" bIns="0" rtlCol="0" anchor="ctr"/>
+          <a:lstStyle/>
+          <a:p>
+            <a:pPr indent="0" marL="0">
+              <a:buNone/>
+            </a:pPr>
+            <a:r>
+              <a:rPr lang="en-US" sz="1600" b="1" dirty="0">
+                <a:solidFill>
+                  <a:schemeClr val="tx1"/>
+                </a:solidFill>
+              </a:rPr>
+              <a:t>Weather check</a:t>
+            </a:r>
+            <a:endParaRPr lang="en-US" sz="1600" dirty="0"/>
+          </a:p>
+        </p:txBody>
+      </p:sp>
+      <p:sp>
+        <p:nvSpPr>
+          <p:cNvPr id="17" name="Text 12"/>
+          <p:cNvSpPr txBox="1"/>
+          <p:nvPr/>
+        </p:nvSpPr>
+        <p:spPr>
+          <a:xfrm>
+            <a:off x="6217920" y="2194560"/>
+            <a:ext cx="2240280" cy="548640"/>
+          </a:xfrm>
+          <a:prstGeom prst="rect">
+            <a:avLst/>
+          </a:prstGeom>
+          <a:noFill/>
+          <a:ln/>
+        </p:spPr>
+        <p:txBody>
+          <a:bodyPr wrap="square" lIns="0" tIns="0" rIns="0" bIns="0" rtlCol="0" anchor="t"/>
+          <a:lstStyle/>
+          <a:p>
+            <a:pPr indent="0" marL="0">
+              <a:buNone/>
+            </a:pPr>
+            <a:r>
+              <a:rPr lang="en-US" sz="1300" dirty="0">
                 <a:solidFill>
                   <a:schemeClr val="tx2"/>
                 </a:solidFill>
               </a:rPr>
-              <a:t>Leaves the charts to the viewer</a:t>
-            </a:r>
-            <a:endParaRPr lang="en-US" sz="1400" dirty="0"/>
-          </a:p>
-          <a:p>
-            <a:pPr marL="342900" indent="-342900">
-              <a:spcAft>
-                <a:spcPts val="800"/>
-              </a:spcAft>
-              <a:buSzPct val="100000"/>
-              <a:buChar char="•"/>
-            </a:pPr>
-            <a:r>
-              <a:rPr lang="en-US" sz="1400" dirty="0">
+              <a:t>Rain ranked against that place's own 10 years.</a:t>
+            </a:r>
+            <a:endParaRPr lang="en-US" sz="1300" dirty="0"/>
+          </a:p>
+        </p:txBody>
+      </p:sp>
+      <p:sp>
+        <p:nvSpPr>
+          <p:cNvPr id="18" name="Feature 4"/>
+          <p:cNvSpPr/>
+          <p:nvPr/>
+        </p:nvSpPr>
+        <p:spPr>
+          <a:xfrm>
+            <a:off x="548640" y="3017520"/>
+            <a:ext cx="2560320" cy="1463040"/>
+          </a:xfrm>
+          <a:prstGeom prst="roundRect">
+            <a:avLst>
+              <a:gd name="adj" fmla="val 7500"/>
+            </a:avLst>
+          </a:prstGeom>
+          <a:solidFill>
+            <a:schemeClr val="bg2"/>
+          </a:solidFill>
+          <a:ln w="12700">
+            <a:solidFill>
+              <a:schemeClr val="bg2"/>
+            </a:solidFill>
+            <a:prstDash val="solid"/>
+          </a:ln>
+        </p:spPr>
+      </p:sp>
+      <p:sp>
+        <p:nvSpPr>
+          <p:cNvPr id="19" name="Crop-aware badge"/>
+          <p:cNvSpPr/>
+          <p:nvPr/>
+        </p:nvSpPr>
+        <p:spPr>
+          <a:xfrm>
+            <a:off x="731520" y="3200400"/>
+            <a:ext cx="502920" cy="502920"/>
+          </a:xfrm>
+          <a:prstGeom prst="ellipse">
+            <a:avLst/>
+          </a:prstGeom>
+          <a:solidFill>
+            <a:schemeClr val="tx1"/>
+          </a:solidFill>
+          <a:ln w="12700">
+            <a:solidFill>
+              <a:schemeClr val="tx1"/>
+            </a:solidFill>
+            <a:prstDash val="solid"/>
+          </a:ln>
+        </p:spPr>
+      </p:sp>
+      <p:pic>
+        <p:nvPicPr>
+          <p:cNvPr id="20" name="Crop-aware icon" descr="Crop-aware">    </p:cNvPr>
+          <p:cNvPicPr>
+            <a:picLocks noChangeAspect="1"/>
+          </p:cNvPicPr>
+          <p:nvPr/>
+        </p:nvPicPr>
+        <p:blipFill>
+          <a:blip r:embed="rId4"/>
+          <a:stretch>
+            <a:fillRect/>
+          </a:stretch>
+        </p:blipFill>
+        <p:spPr>
+          <a:xfrm>
+            <a:off x="857250" y="3326130"/>
+            <a:ext cx="251460" cy="251460"/>
+          </a:xfrm>
+          <a:prstGeom prst="rect">
+            <a:avLst/>
+          </a:prstGeom>
+        </p:spPr>
+      </p:pic>
+      <p:sp>
+        <p:nvSpPr>
+          <p:cNvPr id="21" name="Text 15"/>
+          <p:cNvSpPr txBox="1"/>
+          <p:nvPr/>
+        </p:nvSpPr>
+        <p:spPr>
+          <a:xfrm>
+            <a:off x="1371600" y="3218688"/>
+            <a:ext cx="1645920" cy="457200"/>
+          </a:xfrm>
+          <a:prstGeom prst="rect">
+            <a:avLst/>
+          </a:prstGeom>
+          <a:noFill/>
+          <a:ln/>
+        </p:spPr>
+        <p:txBody>
+          <a:bodyPr wrap="square" lIns="0" tIns="0" rIns="0" bIns="0" rtlCol="0" anchor="ctr"/>
+          <a:lstStyle/>
+          <a:p>
+            <a:pPr indent="0" marL="0">
+              <a:buNone/>
+            </a:pPr>
+            <a:r>
+              <a:rPr lang="en-US" sz="1600" b="1" dirty="0">
+                <a:solidFill>
+                  <a:schemeClr val="tx1"/>
+                </a:solidFill>
+              </a:rPr>
+              <a:t>Crop-aware</a:t>
+            </a:r>
+            <a:endParaRPr lang="en-US" sz="1600" dirty="0"/>
+          </a:p>
+        </p:txBody>
+      </p:sp>
+      <p:sp>
+        <p:nvSpPr>
+          <p:cNvPr id="22" name="Text 16"/>
+          <p:cNvSpPr txBox="1"/>
+          <p:nvPr/>
+        </p:nvSpPr>
+        <p:spPr>
+          <a:xfrm>
+            <a:off x="731520" y="3840480"/>
+            <a:ext cx="2240280" cy="548640"/>
+          </a:xfrm>
+          <a:prstGeom prst="rect">
+            <a:avLst/>
+          </a:prstGeom>
+          <a:noFill/>
+          <a:ln/>
+        </p:spPr>
+        <p:txBody>
+          <a:bodyPr wrap="square" lIns="0" tIns="0" rIns="0" bIns="0" rtlCol="0" anchor="t"/>
+          <a:lstStyle/>
+          <a:p>
+            <a:pPr indent="0" marL="0">
+              <a:buNone/>
+            </a:pPr>
+            <a:r>
+              <a:rPr lang="en-US" sz="1300" dirty="0">
                 <a:solidFill>
                   <a:schemeClr val="tx2"/>
                 </a:solidFill>
               </a:rPr>
-              <a:t>Output is a view</a:t>
-            </a:r>
-            <a:endParaRPr lang="en-US" sz="1400" dirty="0"/>
-          </a:p>
-        </p:txBody>
-      </p:sp>
-      <p:sp>
-        <p:nvSpPr>
-          <p:cNvPr id="7" name="Text 5"/>
+              <a:t>20 crops, growth stage and ripening guard.</a:t>
+            </a:r>
+            <a:endParaRPr lang="en-US" sz="1300" dirty="0"/>
+          </a:p>
+        </p:txBody>
+      </p:sp>
+      <p:sp>
+        <p:nvSpPr>
+          <p:cNvPr id="23" name="Feature 5"/>
+          <p:cNvSpPr/>
+          <p:nvPr/>
+        </p:nvSpPr>
+        <p:spPr>
+          <a:xfrm>
+            <a:off x="3291840" y="3017520"/>
+            <a:ext cx="2560320" cy="1463040"/>
+          </a:xfrm>
+          <a:prstGeom prst="roundRect">
+            <a:avLst>
+              <a:gd name="adj" fmla="val 7500"/>
+            </a:avLst>
+          </a:prstGeom>
+          <a:solidFill>
+            <a:schemeClr val="bg2"/>
+          </a:solidFill>
+          <a:ln w="12700">
+            <a:solidFill>
+              <a:schemeClr val="bg2"/>
+            </a:solidFill>
+            <a:prstDash val="solid"/>
+          </a:ln>
+        </p:spPr>
+      </p:sp>
+      <p:sp>
+        <p:nvSpPr>
+          <p:cNvPr id="24" name="Signed report badge"/>
+          <p:cNvSpPr/>
+          <p:nvPr/>
+        </p:nvSpPr>
+        <p:spPr>
+          <a:xfrm>
+            <a:off x="3474720" y="3200400"/>
+            <a:ext cx="502920" cy="502920"/>
+          </a:xfrm>
+          <a:prstGeom prst="ellipse">
+            <a:avLst/>
+          </a:prstGeom>
+          <a:solidFill>
+            <a:schemeClr val="tx1"/>
+          </a:solidFill>
+          <a:ln w="12700">
+            <a:solidFill>
+              <a:schemeClr val="tx1"/>
+            </a:solidFill>
+            <a:prstDash val="solid"/>
+          </a:ln>
+        </p:spPr>
+      </p:sp>
+      <p:pic>
+        <p:nvPicPr>
+          <p:cNvPr id="25" name="Signed report icon" descr="Signed report">    </p:cNvPr>
+          <p:cNvPicPr>
+            <a:picLocks noChangeAspect="1"/>
+          </p:cNvPicPr>
+          <p:nvPr/>
+        </p:nvPicPr>
+        <p:blipFill>
+          <a:blip r:embed="rId5"/>
+          <a:stretch>
+            <a:fillRect/>
+          </a:stretch>
+        </p:blipFill>
+        <p:spPr>
+          <a:xfrm>
+            <a:off x="3600450" y="3326130"/>
+            <a:ext cx="251460" cy="251460"/>
+          </a:xfrm>
+          <a:prstGeom prst="rect">
+            <a:avLst/>
+          </a:prstGeom>
+        </p:spPr>
+      </p:pic>
+      <p:sp>
+        <p:nvSpPr>
+          <p:cNvPr id="26" name="Text 19"/>
           <p:cNvSpPr txBox="1"/>
           <p:nvPr/>
         </p:nvSpPr>
         <p:spPr>
           <a:xfrm>
-            <a:off x="4892040" y="1554480"/>
-            <a:ext cx="3474720" cy="365760"/>
+            <a:off x="4114800" y="3218688"/>
+            <a:ext cx="1645920" cy="457200"/>
           </a:xfrm>
           <a:prstGeom prst="rect">
             <a:avLst/>
@@ -5377,27 +5377,27 @@
               <a:buNone/>
             </a:pPr>
             <a:r>
-              <a:rPr lang="en-US" sz="2000" b="1" dirty="0">
-                <a:solidFill>
-                  <a:schemeClr val="accent1"/>
-                </a:solidFill>
-              </a:rPr>
-              <a:t>FasalProof</a:t>
-            </a:r>
-            <a:endParaRPr lang="en-US" sz="2000" dirty="0"/>
-          </a:p>
-        </p:txBody>
-      </p:sp>
-      <p:sp>
-        <p:nvSpPr>
-          <p:cNvPr id="8" name="Text 6"/>
+              <a:rPr lang="en-US" sz="1600" b="1" dirty="0">
+                <a:solidFill>
+                  <a:schemeClr val="tx1"/>
+                </a:solidFill>
+              </a:rPr>
+              <a:t>Signed report</a:t>
+            </a:r>
+            <a:endParaRPr lang="en-US" sz="1600" dirty="0"/>
+          </a:p>
+        </p:txBody>
+      </p:sp>
+      <p:sp>
+        <p:nvSpPr>
+          <p:cNvPr id="27" name="Text 20"/>
           <p:cNvSpPr txBox="1"/>
           <p:nvPr/>
         </p:nvSpPr>
         <p:spPr>
           <a:xfrm>
-            <a:off x="4892040" y="2057400"/>
-            <a:ext cx="3474720" cy="2286000"/>
+            <a:off x="3474720" y="3840480"/>
+            <a:ext cx="2240280" cy="548640"/>
           </a:xfrm>
           <a:prstGeom prst="rect">
             <a:avLst/>
@@ -5409,76 +5409,166 @@
           <a:bodyPr wrap="square" lIns="0" tIns="0" rIns="0" bIns="0" rtlCol="0" anchor="t"/>
           <a:lstStyle/>
           <a:p>
-            <a:pPr marL="342900" indent="-342900">
-              <a:spcAft>
-                <a:spcPts val="800"/>
-              </a:spcAft>
-              <a:buSzPct val="100000"/>
-              <a:buChar char="•"/>
-            </a:pPr>
-            <a:r>
-              <a:rPr lang="en-US" sz="1400" dirty="0">
-                <a:solidFill>
-                  <a:schemeClr val="bg1"/>
-                </a:solidFill>
-              </a:rPr>
-              <a:t>Starts from one plot and one loss date</a:t>
-            </a:r>
-            <a:endParaRPr lang="en-US" sz="1400" dirty="0"/>
-          </a:p>
-          <a:p>
-            <a:pPr marL="342900" indent="-342900">
-              <a:spcAft>
-                <a:spcPts val="800"/>
-              </a:spcAft>
-              <a:buSzPct val="100000"/>
-              <a:buChar char="•"/>
-            </a:pPr>
-            <a:r>
-              <a:rPr lang="en-US" sz="1400" dirty="0">
-                <a:solidFill>
-                  <a:schemeClr val="bg1"/>
-                </a:solidFill>
-              </a:rPr>
-              <a:t>Asks: was this field damaged, by how much, how sure are we?</a:t>
-            </a:r>
-            <a:endParaRPr lang="en-US" sz="1400" dirty="0"/>
-          </a:p>
-          <a:p>
-            <a:pPr marL="342900" indent="-342900">
-              <a:spcAft>
-                <a:spcPts val="800"/>
-              </a:spcAft>
-              <a:buSzPct val="100000"/>
-              <a:buChar char="•"/>
-            </a:pPr>
-            <a:r>
-              <a:rPr lang="en-US" sz="1400" dirty="0">
-                <a:solidFill>
-                  <a:schemeClr val="bg1"/>
-                </a:solidFill>
-              </a:rPr>
-              <a:t>Adds local rain history, crop stage, claim route and deadline</a:t>
-            </a:r>
-            <a:endParaRPr lang="en-US" sz="1400" dirty="0"/>
-          </a:p>
-          <a:p>
-            <a:pPr marL="342900" indent="-342900">
-              <a:spcAft>
-                <a:spcPts val="800"/>
-              </a:spcAft>
-              <a:buSzPct val="100000"/>
-              <a:buChar char="•"/>
-            </a:pPr>
-            <a:r>
-              <a:rPr lang="en-US" sz="1400" dirty="0">
-                <a:solidFill>
-                  <a:schemeClr val="bg1"/>
-                </a:solidFill>
-              </a:rPr>
-              <a:t>Output is a signed evidence pack and a claim letter</a:t>
-            </a:r>
-            <a:endParaRPr lang="en-US" sz="1400" dirty="0"/>
+            <a:pPr indent="0" marL="0">
+              <a:buNone/>
+            </a:pPr>
+            <a:r>
+              <a:rPr lang="en-US" sz="1300" dirty="0">
+                <a:solidFill>
+                  <a:schemeClr val="tx2"/>
+                </a:solidFill>
+              </a:rPr>
+              <a:t>Anyone can verify it has not been edited.</a:t>
+            </a:r>
+            <a:endParaRPr lang="en-US" sz="1300" dirty="0"/>
+          </a:p>
+        </p:txBody>
+      </p:sp>
+      <p:sp>
+        <p:nvSpPr>
+          <p:cNvPr id="28" name="Feature 6"/>
+          <p:cNvSpPr/>
+          <p:nvPr/>
+        </p:nvSpPr>
+        <p:spPr>
+          <a:xfrm>
+            <a:off x="6035040" y="3017520"/>
+            <a:ext cx="2560320" cy="1463040"/>
+          </a:xfrm>
+          <a:prstGeom prst="roundRect">
+            <a:avLst>
+              <a:gd name="adj" fmla="val 7500"/>
+            </a:avLst>
+          </a:prstGeom>
+          <a:solidFill>
+            <a:schemeClr val="bg2"/>
+          </a:solidFill>
+          <a:ln w="12700">
+            <a:solidFill>
+              <a:schemeClr val="bg2"/>
+            </a:solidFill>
+            <a:prstDash val="solid"/>
+          </a:ln>
+        </p:spPr>
+      </p:sp>
+      <p:sp>
+        <p:nvSpPr>
+          <p:cNvPr id="29" name="Six languages badge"/>
+          <p:cNvSpPr/>
+          <p:nvPr/>
+        </p:nvSpPr>
+        <p:spPr>
+          <a:xfrm>
+            <a:off x="6217920" y="3200400"/>
+            <a:ext cx="502920" cy="502920"/>
+          </a:xfrm>
+          <a:prstGeom prst="ellipse">
+            <a:avLst/>
+          </a:prstGeom>
+          <a:solidFill>
+            <a:schemeClr val="tx1"/>
+          </a:solidFill>
+          <a:ln w="12700">
+            <a:solidFill>
+              <a:schemeClr val="tx1"/>
+            </a:solidFill>
+            <a:prstDash val="solid"/>
+          </a:ln>
+        </p:spPr>
+      </p:sp>
+      <p:pic>
+        <p:nvPicPr>
+          <p:cNvPr id="30" name="Six languages icon" descr="Six languages">    </p:cNvPr>
+          <p:cNvPicPr>
+            <a:picLocks noChangeAspect="1"/>
+          </p:cNvPicPr>
+          <p:nvPr/>
+        </p:nvPicPr>
+        <p:blipFill>
+          <a:blip r:embed="rId6"/>
+          <a:stretch>
+            <a:fillRect/>
+          </a:stretch>
+        </p:blipFill>
+        <p:spPr>
+          <a:xfrm>
+            <a:off x="6343650" y="3326130"/>
+            <a:ext cx="251460" cy="251460"/>
+          </a:xfrm>
+          <a:prstGeom prst="rect">
+            <a:avLst/>
+          </a:prstGeom>
+        </p:spPr>
+      </p:pic>
+      <p:sp>
+        <p:nvSpPr>
+          <p:cNvPr id="31" name="Text 23"/>
+          <p:cNvSpPr txBox="1"/>
+          <p:nvPr/>
+        </p:nvSpPr>
+        <p:spPr>
+          <a:xfrm>
+            <a:off x="6858000" y="3218688"/>
+            <a:ext cx="1645920" cy="457200"/>
+          </a:xfrm>
+          <a:prstGeom prst="rect">
+            <a:avLst/>
+          </a:prstGeom>
+          <a:noFill/>
+          <a:ln/>
+        </p:spPr>
+        <p:txBody>
+          <a:bodyPr wrap="square" lIns="0" tIns="0" rIns="0" bIns="0" rtlCol="0" anchor="ctr"/>
+          <a:lstStyle/>
+          <a:p>
+            <a:pPr indent="0" marL="0">
+              <a:buNone/>
+            </a:pPr>
+            <a:r>
+              <a:rPr lang="en-US" sz="1600" b="1" dirty="0">
+                <a:solidFill>
+                  <a:schemeClr val="tx1"/>
+                </a:solidFill>
+              </a:rPr>
+              <a:t>Six languages</a:t>
+            </a:r>
+            <a:endParaRPr lang="en-US" sz="1600" dirty="0"/>
+          </a:p>
+        </p:txBody>
+      </p:sp>
+      <p:sp>
+        <p:nvSpPr>
+          <p:cNvPr id="32" name="Text 24"/>
+          <p:cNvSpPr txBox="1"/>
+          <p:nvPr/>
+        </p:nvSpPr>
+        <p:spPr>
+          <a:xfrm>
+            <a:off x="6217920" y="3840480"/>
+            <a:ext cx="2240280" cy="548640"/>
+          </a:xfrm>
+          <a:prstGeom prst="rect">
+            <a:avLst/>
+          </a:prstGeom>
+          <a:noFill/>
+          <a:ln/>
+        </p:spPr>
+        <p:txBody>
+          <a:bodyPr wrap="square" lIns="0" tIns="0" rIns="0" bIns="0" rtlCol="0" anchor="t"/>
+          <a:lstStyle/>
+          <a:p>
+            <a:pPr indent="0" marL="0">
+              <a:buNone/>
+            </a:pPr>
+            <a:r>
+              <a:rPr lang="en-US" sz="1300" dirty="0">
+                <a:solidFill>
+                  <a:schemeClr val="tx2"/>
+                </a:solidFill>
+              </a:rPr>
+              <a:t>Assistant, letter and report, worldwide.</a:t>
+            </a:r>
+            <a:endParaRPr lang="en-US" sz="1300" dirty="0"/>
           </a:p>
         </p:txBody>
       </p:sp>
@@ -5584,7 +5674,7 @@
                   <a:schemeClr val="tx1"/>
                 </a:solidFill>
               </a:rPr>
-              <a:t>Honest by design</a:t>
+              <a:t>More than a dashboard</a:t>
             </a:r>
             <a:endParaRPr lang="en-US" sz="3600" dirty="0"/>
           </a:p>
@@ -5592,7 +5682,7 @@
       </p:sp>
       <p:sp>
         <p:nvSpPr>
-          <p:cNvPr id="3" name="Limits card"/>
+          <p:cNvPr id="3" name="Dashboard card"/>
           <p:cNvSpPr/>
           <p:nvPr/>
         </p:nvSpPr>
@@ -5619,7 +5709,7 @@
       </p:sp>
       <p:sp>
         <p:nvSpPr>
-          <p:cNvPr id="4" name="Validation card"/>
+          <p:cNvPr id="4" name="FasalProof card"/>
           <p:cNvSpPr/>
           <p:nvPr/>
         </p:nvSpPr>
@@ -5634,11 +5724,11 @@
             </a:avLst>
           </a:prstGeom>
           <a:solidFill>
-            <a:schemeClr val="bg2"/>
+            <a:schemeClr val="tx1"/>
           </a:solidFill>
           <a:ln w="12700">
             <a:solidFill>
-              <a:schemeClr val="bg2"/>
+              <a:schemeClr val="tx1"/>
             </a:solidFill>
             <a:prstDash val="solid"/>
           </a:ln>
@@ -5674,7 +5764,7 @@
                   <a:schemeClr val="tx1"/>
                 </a:solidFill>
               </a:rPr>
-              <a:t>Limits we show on screen</a:t>
+              <a:t>A conventional dashboard</a:t>
             </a:r>
             <a:endParaRPr lang="en-US" sz="2000" dirty="0"/>
           </a:p>
@@ -5688,7 +5778,7 @@
         </p:nvSpPr>
         <p:spPr>
           <a:xfrm>
-            <a:off x="777240" y="2011680"/>
+            <a:off x="777240" y="2057400"/>
             <a:ext cx="3474720" cy="2286000"/>
           </a:xfrm>
           <a:prstGeom prst="rect">
@@ -5714,7 +5804,7 @@
                   <a:schemeClr val="tx2"/>
                 </a:solidFill>
               </a:rPr>
-              <a:t>Supporting evidence, not an official assessment</a:t>
+              <a:t>Aggregates by district or region</a:t>
             </a:r>
             <a:endParaRPr lang="en-US" sz="1400" dirty="0"/>
           </a:p>
@@ -5732,7 +5822,7 @@
                   <a:schemeClr val="tx2"/>
                 </a:solidFill>
               </a:rPr>
-              <a:t>No accuracy figure claimed yet</a:t>
+              <a:t>Asks: how is the season going?</a:t>
             </a:r>
             <a:endParaRPr lang="en-US" sz="1400" dirty="0"/>
           </a:p>
@@ -5750,7 +5840,7 @@
                   <a:schemeClr val="tx2"/>
                 </a:solidFill>
               </a:rPr>
-              <a:t>Stage data are regional averages</a:t>
+              <a:t>Leaves the charts to the viewer</a:t>
             </a:r>
             <a:endParaRPr lang="en-US" sz="1400" dirty="0"/>
           </a:p>
@@ -5768,7 +5858,7 @@
                   <a:schemeClr val="tx2"/>
                 </a:solidFill>
               </a:rPr>
-              <a:t>Rules and sum insured come from the policy</a:t>
+              <a:t>Output is a view</a:t>
             </a:r>
             <a:endParaRPr lang="en-US" sz="1400" dirty="0"/>
           </a:p>
@@ -5801,10 +5891,10 @@
             <a:r>
               <a:rPr lang="en-US" sz="2000" b="1" dirty="0">
                 <a:solidFill>
-                  <a:schemeClr val="tx1"/>
-                </a:solidFill>
-              </a:rPr>
-              <a:t>How we will validate</a:t>
+                  <a:schemeClr val="accent1"/>
+                </a:solidFill>
+              </a:rPr>
+              <a:t>FasalProof</a:t>
             </a:r>
             <a:endParaRPr lang="en-US" sz="2000" dirty="0"/>
           </a:p>
@@ -5818,7 +5908,7 @@
         </p:nvSpPr>
         <p:spPr>
           <a:xfrm>
-            <a:off x="4892040" y="2011680"/>
+            <a:off x="4892040" y="2057400"/>
             <a:ext cx="3474720" cy="2286000"/>
           </a:xfrm>
           <a:prstGeom prst="rect">
@@ -5841,10 +5931,10 @@
             <a:r>
               <a:rPr lang="en-US" sz="1400" dirty="0">
                 <a:solidFill>
-                  <a:schemeClr val="tx2"/>
-                </a:solidFill>
-              </a:rPr>
-              <a:t>Documented damaged fields plus no-event fields</a:t>
+                  <a:schemeClr val="bg1"/>
+                </a:solidFill>
+              </a:rPr>
+              <a:t>Starts from one plot and one loss date</a:t>
             </a:r>
             <a:endParaRPr lang="en-US" sz="1400" dirty="0"/>
           </a:p>
@@ -5859,10 +5949,10 @@
             <a:r>
               <a:rPr lang="en-US" sz="1400" dirty="0">
                 <a:solidFill>
-                  <a:schemeClr val="tx2"/>
-                </a:solidFill>
-              </a:rPr>
-              <a:t>Precision, recall and specificity</a:t>
+                  <a:schemeClr val="bg1"/>
+                </a:solidFill>
+              </a:rPr>
+              <a:t>Asks: was this field damaged, by how much, how sure are we?</a:t>
             </a:r>
             <a:endParaRPr lang="en-US" sz="1400" dirty="0"/>
           </a:p>
@@ -5877,10 +5967,10 @@
             <a:r>
               <a:rPr lang="en-US" sz="1400" dirty="0">
                 <a:solidFill>
-                  <a:schemeClr val="tx2"/>
-                </a:solidFill>
-              </a:rPr>
-              <a:t>Error against officially reported loss</a:t>
+                  <a:schemeClr val="bg1"/>
+                </a:solidFill>
+              </a:rPr>
+              <a:t>Adds local rain history, crop stage, claim route and deadline</a:t>
             </a:r>
             <a:endParaRPr lang="en-US" sz="1400" dirty="0"/>
           </a:p>
@@ -5895,10 +5985,10 @@
             <a:r>
               <a:rPr lang="en-US" sz="1400" dirty="0">
                 <a:solidFill>
-                  <a:schemeClr val="tx2"/>
-                </a:solidFill>
-              </a:rPr>
-              <a:t>Results published in the README</a:t>
+                  <a:schemeClr val="bg1"/>
+                </a:solidFill>
+              </a:rPr>
+              <a:t>Output is a signed evidence pack and a claim letter</a:t>
             </a:r>
             <a:endParaRPr lang="en-US" sz="1400" dirty="0"/>
           </a:p>
@@ -5960,6 +6050,428 @@
 <file path=ppt/slides/slide8.xml><?xml version="1.0" encoding="utf-8"?>
 <p:sld xmlns:a="http://schemas.openxmlformats.org/drawingml/2006/main" xmlns:r="http://schemas.openxmlformats.org/officeDocument/2006/relationships" xmlns:p="http://schemas.openxmlformats.org/presentationml/2006/main">
   <p:cSld name="Slide 8">
+    <p:spTree>
+      <p:nvGrpSpPr>
+        <p:cNvPr id="1" name=""/>
+        <p:cNvGrpSpPr/>
+        <p:nvPr/>
+      </p:nvGrpSpPr>
+      <p:grpSpPr>
+        <a:xfrm>
+          <a:off x="0" y="0"/>
+          <a:ext cx="0" cy="0"/>
+          <a:chOff x="0" y="0"/>
+          <a:chExt cx="0" cy="0"/>
+        </a:xfrm>
+      </p:grpSpPr>
+      <p:sp>
+        <p:nvSpPr>
+          <p:cNvPr id="2" name="Text 1"/>
+          <p:cNvSpPr/>
+          <p:nvPr>
+            <p:ph idx="101" type="title" hasCustomPrompt="1"/>
+          </p:nvPr>
+        </p:nvSpPr>
+        <p:spPr>
+          <a:xfrm>
+            <a:off x="548640" y="411480"/>
+            <a:ext cx="8046720" cy="731520"/>
+          </a:xfrm>
+          <a:prstGeom prst="rect">
+            <a:avLst/>
+          </a:prstGeom>
+          <a:noFill/>
+          <a:ln/>
+        </p:spPr>
+        <p:txBody>
+          <a:bodyPr wrap="square" lIns="0" tIns="0" rIns="0" bIns="0" rtlCol="0" anchor="t"/>
+          <a:lstStyle/>
+          <a:p>
+            <a:pPr algn="l" indent="0" marL="0">
+              <a:buNone/>
+            </a:pPr>
+            <a:r>
+              <a:rPr lang="en-US" sz="3600" b="1" dirty="0">
+                <a:solidFill>
+                  <a:schemeClr val="tx1"/>
+                </a:solidFill>
+              </a:rPr>
+              <a:t>Honest by design</a:t>
+            </a:r>
+            <a:endParaRPr lang="en-US" sz="3600" dirty="0"/>
+          </a:p>
+        </p:txBody>
+      </p:sp>
+      <p:sp>
+        <p:nvSpPr>
+          <p:cNvPr id="3" name="Limits card"/>
+          <p:cNvSpPr/>
+          <p:nvPr/>
+        </p:nvSpPr>
+        <p:spPr>
+          <a:xfrm>
+            <a:off x="548640" y="1371600"/>
+            <a:ext cx="3931920" cy="3108960"/>
+          </a:xfrm>
+          <a:prstGeom prst="roundRect">
+            <a:avLst>
+              <a:gd name="adj" fmla="val 3529"/>
+            </a:avLst>
+          </a:prstGeom>
+          <a:solidFill>
+            <a:schemeClr val="bg2"/>
+          </a:solidFill>
+          <a:ln w="12700">
+            <a:solidFill>
+              <a:schemeClr val="bg2"/>
+            </a:solidFill>
+            <a:prstDash val="solid"/>
+          </a:ln>
+        </p:spPr>
+      </p:sp>
+      <p:sp>
+        <p:nvSpPr>
+          <p:cNvPr id="4" name="Validation card"/>
+          <p:cNvSpPr/>
+          <p:nvPr/>
+        </p:nvSpPr>
+        <p:spPr>
+          <a:xfrm>
+            <a:off x="4663440" y="1371600"/>
+            <a:ext cx="3931920" cy="3108960"/>
+          </a:xfrm>
+          <a:prstGeom prst="roundRect">
+            <a:avLst>
+              <a:gd name="adj" fmla="val 3529"/>
+            </a:avLst>
+          </a:prstGeom>
+          <a:solidFill>
+            <a:schemeClr val="bg2"/>
+          </a:solidFill>
+          <a:ln w="12700">
+            <a:solidFill>
+              <a:schemeClr val="bg2"/>
+            </a:solidFill>
+            <a:prstDash val="solid"/>
+          </a:ln>
+        </p:spPr>
+      </p:sp>
+      <p:sp>
+        <p:nvSpPr>
+          <p:cNvPr id="5" name="Text 3"/>
+          <p:cNvSpPr txBox="1"/>
+          <p:nvPr/>
+        </p:nvSpPr>
+        <p:spPr>
+          <a:xfrm>
+            <a:off x="777240" y="1554480"/>
+            <a:ext cx="3474720" cy="365760"/>
+          </a:xfrm>
+          <a:prstGeom prst="rect">
+            <a:avLst/>
+          </a:prstGeom>
+          <a:noFill/>
+          <a:ln/>
+        </p:spPr>
+        <p:txBody>
+          <a:bodyPr wrap="square" lIns="0" tIns="0" rIns="0" bIns="0" rtlCol="0" anchor="ctr"/>
+          <a:lstStyle/>
+          <a:p>
+            <a:pPr indent="0" marL="0">
+              <a:buNone/>
+            </a:pPr>
+            <a:r>
+              <a:rPr lang="en-US" sz="2000" b="1" dirty="0">
+                <a:solidFill>
+                  <a:schemeClr val="tx1"/>
+                </a:solidFill>
+              </a:rPr>
+              <a:t>Limits we show on screen</a:t>
+            </a:r>
+            <a:endParaRPr lang="en-US" sz="2000" dirty="0"/>
+          </a:p>
+        </p:txBody>
+      </p:sp>
+      <p:sp>
+        <p:nvSpPr>
+          <p:cNvPr id="6" name="Text 4"/>
+          <p:cNvSpPr txBox="1"/>
+          <p:nvPr/>
+        </p:nvSpPr>
+        <p:spPr>
+          <a:xfrm>
+            <a:off x="777240" y="2011680"/>
+            <a:ext cx="3474720" cy="2286000"/>
+          </a:xfrm>
+          <a:prstGeom prst="rect">
+            <a:avLst/>
+          </a:prstGeom>
+          <a:noFill/>
+          <a:ln/>
+        </p:spPr>
+        <p:txBody>
+          <a:bodyPr wrap="square" lIns="0" tIns="0" rIns="0" bIns="0" rtlCol="0" anchor="t"/>
+          <a:lstStyle/>
+          <a:p>
+            <a:pPr marL="342900" indent="-342900">
+              <a:spcAft>
+                <a:spcPts val="800"/>
+              </a:spcAft>
+              <a:buSzPct val="100000"/>
+              <a:buChar char="•"/>
+            </a:pPr>
+            <a:r>
+              <a:rPr lang="en-US" sz="1400" dirty="0">
+                <a:solidFill>
+                  <a:schemeClr val="tx2"/>
+                </a:solidFill>
+              </a:rPr>
+              <a:t>Supporting evidence, not an official assessment</a:t>
+            </a:r>
+            <a:endParaRPr lang="en-US" sz="1400" dirty="0"/>
+          </a:p>
+          <a:p>
+            <a:pPr marL="342900" indent="-342900">
+              <a:spcAft>
+                <a:spcPts val="800"/>
+              </a:spcAft>
+              <a:buSzPct val="100000"/>
+              <a:buChar char="•"/>
+            </a:pPr>
+            <a:r>
+              <a:rPr lang="en-US" sz="1400" dirty="0">
+                <a:solidFill>
+                  <a:schemeClr val="tx2"/>
+                </a:solidFill>
+              </a:rPr>
+              <a:t>No accuracy figure claimed yet</a:t>
+            </a:r>
+            <a:endParaRPr lang="en-US" sz="1400" dirty="0"/>
+          </a:p>
+          <a:p>
+            <a:pPr marL="342900" indent="-342900">
+              <a:spcAft>
+                <a:spcPts val="800"/>
+              </a:spcAft>
+              <a:buSzPct val="100000"/>
+              <a:buChar char="•"/>
+            </a:pPr>
+            <a:r>
+              <a:rPr lang="en-US" sz="1400" dirty="0">
+                <a:solidFill>
+                  <a:schemeClr val="tx2"/>
+                </a:solidFill>
+              </a:rPr>
+              <a:t>Stage data are regional averages</a:t>
+            </a:r>
+            <a:endParaRPr lang="en-US" sz="1400" dirty="0"/>
+          </a:p>
+          <a:p>
+            <a:pPr marL="342900" indent="-342900">
+              <a:spcAft>
+                <a:spcPts val="800"/>
+              </a:spcAft>
+              <a:buSzPct val="100000"/>
+              <a:buChar char="•"/>
+            </a:pPr>
+            <a:r>
+              <a:rPr lang="en-US" sz="1400" dirty="0">
+                <a:solidFill>
+                  <a:schemeClr val="tx2"/>
+                </a:solidFill>
+              </a:rPr>
+              <a:t>Rules and sum insured come from the policy</a:t>
+            </a:r>
+            <a:endParaRPr lang="en-US" sz="1400" dirty="0"/>
+          </a:p>
+        </p:txBody>
+      </p:sp>
+      <p:sp>
+        <p:nvSpPr>
+          <p:cNvPr id="7" name="Text 5"/>
+          <p:cNvSpPr txBox="1"/>
+          <p:nvPr/>
+        </p:nvSpPr>
+        <p:spPr>
+          <a:xfrm>
+            <a:off x="4892040" y="1554480"/>
+            <a:ext cx="3474720" cy="365760"/>
+          </a:xfrm>
+          <a:prstGeom prst="rect">
+            <a:avLst/>
+          </a:prstGeom>
+          <a:noFill/>
+          <a:ln/>
+        </p:spPr>
+        <p:txBody>
+          <a:bodyPr wrap="square" lIns="0" tIns="0" rIns="0" bIns="0" rtlCol="0" anchor="ctr"/>
+          <a:lstStyle/>
+          <a:p>
+            <a:pPr indent="0" marL="0">
+              <a:buNone/>
+            </a:pPr>
+            <a:r>
+              <a:rPr lang="en-US" sz="2000" b="1" dirty="0">
+                <a:solidFill>
+                  <a:schemeClr val="tx1"/>
+                </a:solidFill>
+              </a:rPr>
+              <a:t>How we will validate</a:t>
+            </a:r>
+            <a:endParaRPr lang="en-US" sz="2000" dirty="0"/>
+          </a:p>
+        </p:txBody>
+      </p:sp>
+      <p:sp>
+        <p:nvSpPr>
+          <p:cNvPr id="8" name="Text 6"/>
+          <p:cNvSpPr txBox="1"/>
+          <p:nvPr/>
+        </p:nvSpPr>
+        <p:spPr>
+          <a:xfrm>
+            <a:off x="4892040" y="2011680"/>
+            <a:ext cx="3474720" cy="2286000"/>
+          </a:xfrm>
+          <a:prstGeom prst="rect">
+            <a:avLst/>
+          </a:prstGeom>
+          <a:noFill/>
+          <a:ln/>
+        </p:spPr>
+        <p:txBody>
+          <a:bodyPr wrap="square" lIns="0" tIns="0" rIns="0" bIns="0" rtlCol="0" anchor="t"/>
+          <a:lstStyle/>
+          <a:p>
+            <a:pPr marL="342900" indent="-342900">
+              <a:spcAft>
+                <a:spcPts val="800"/>
+              </a:spcAft>
+              <a:buSzPct val="100000"/>
+              <a:buChar char="•"/>
+            </a:pPr>
+            <a:r>
+              <a:rPr lang="en-US" sz="1400" dirty="0">
+                <a:solidFill>
+                  <a:schemeClr val="tx2"/>
+                </a:solidFill>
+              </a:rPr>
+              <a:t>Documented damaged fields plus no-event fields</a:t>
+            </a:r>
+            <a:endParaRPr lang="en-US" sz="1400" dirty="0"/>
+          </a:p>
+          <a:p>
+            <a:pPr marL="342900" indent="-342900">
+              <a:spcAft>
+                <a:spcPts val="800"/>
+              </a:spcAft>
+              <a:buSzPct val="100000"/>
+              <a:buChar char="•"/>
+            </a:pPr>
+            <a:r>
+              <a:rPr lang="en-US" sz="1400" dirty="0">
+                <a:solidFill>
+                  <a:schemeClr val="tx2"/>
+                </a:solidFill>
+              </a:rPr>
+              <a:t>Precision, recall and specificity</a:t>
+            </a:r>
+            <a:endParaRPr lang="en-US" sz="1400" dirty="0"/>
+          </a:p>
+          <a:p>
+            <a:pPr marL="342900" indent="-342900">
+              <a:spcAft>
+                <a:spcPts val="800"/>
+              </a:spcAft>
+              <a:buSzPct val="100000"/>
+              <a:buChar char="•"/>
+            </a:pPr>
+            <a:r>
+              <a:rPr lang="en-US" sz="1400" dirty="0">
+                <a:solidFill>
+                  <a:schemeClr val="tx2"/>
+                </a:solidFill>
+              </a:rPr>
+              <a:t>Error against officially reported loss</a:t>
+            </a:r>
+            <a:endParaRPr lang="en-US" sz="1400" dirty="0"/>
+          </a:p>
+          <a:p>
+            <a:pPr marL="342900" indent="-342900">
+              <a:spcAft>
+                <a:spcPts val="800"/>
+              </a:spcAft>
+              <a:buSzPct val="100000"/>
+              <a:buChar char="•"/>
+            </a:pPr>
+            <a:r>
+              <a:rPr lang="en-US" sz="1400" dirty="0">
+                <a:solidFill>
+                  <a:schemeClr val="tx2"/>
+                </a:solidFill>
+              </a:rPr>
+              <a:t>Results published in the README</a:t>
+            </a:r>
+            <a:endParaRPr lang="en-US" sz="1400" dirty="0"/>
+          </a:p>
+        </p:txBody>
+      </p:sp>
+      <p:sp>
+        <p:nvSpPr>
+          <p:cNvPr id="25" name="Slide Number Placeholder 0"/>
+          <p:cNvSpPr>
+            <a:spLocks noGrp="1"/>
+          </p:cNvSpPr>
+          <p:nvPr>
+            <p:ph type="sldNum" sz="quarter" idx="4294967295"/>
+          </p:nvPr>
+        </p:nvSpPr>
+        <p:spPr>
+          <a:xfrm>
+            <a:off x="8412480" y="4800600"/>
+            <a:ext cx="457200" cy="228600"/>
+          </a:xfrm>
+          <a:prstGeom prst="rect">
+            <a:avLst/>
+          </a:prstGeom>
+          <a:extLst>
+            <a:ext uri="{C572A759-6A51-4108-AA02-DFA0A04FC94B}">
+              <ma14:wrappingTextBoxFlag xmlns:ma14="http://schemas.microsoft.com/office/mac/drawingml/2011/main" val="0"/>
+            </a:ext>
+          </a:extLst>
+        </p:spPr>
+        <p:txBody>
+          <a:bodyPr/>
+          <a:lstStyle>
+            <a:lvl1pPr>
+              <a:defRPr sz="1000">
+                <a:solidFill>
+                  <a:schemeClr val="tx2"/>
+                </a:solidFill>
+              </a:defRPr>
+            </a:lvl1pPr>
+          </a:lstStyle>
+          <a:p>
+            <a:pPr algn="l"/>
+            <a:fld id="{F7021451-1387-4CA6-816F-3879F97B5CBC}" type="slidenum">
+              <a:rPr b="0" lang="en-US"/>
+              <a:t>8</a:t>
+            </a:fld>
+            <a:endParaRPr lang="en-US"/>
+          </a:p>
+        </p:txBody>
+      </p:sp>
+    </p:spTree>
+  </p:cSld>
+  <p:clrMapOvr>
+    <a:masterClrMapping/>
+  </p:clrMapOvr>
+</p:sld>
+</file>
+
+<file path=ppt/slides/slide9.xml><?xml version="1.0" encoding="utf-8"?>
+<p:sld xmlns:a="http://schemas.openxmlformats.org/drawingml/2006/main" xmlns:r="http://schemas.openxmlformats.org/officeDocument/2006/relationships" xmlns:p="http://schemas.openxmlformats.org/presentationml/2006/main">
+  <p:cSld name="Slide 9">
     <p:spTree>
       <p:nvGrpSpPr>
         <p:cNvPr id="1" name=""/>
